--- a/宣道詩/(宣道詩238) 榮耀釋放.pptx
+++ b/宣道詩/(宣道詩238) 榮耀釋放.pptx
@@ -5,18 +5,25 @@
     <p:sldMasterId id="2147483660" r:id="rId1"/>
   </p:sldMasterIdLst>
   <p:notesMasterIdLst>
-    <p:notesMasterId r:id="rId8"/>
+    <p:notesMasterId r:id="rId15"/>
   </p:notesMasterIdLst>
   <p:handoutMasterIdLst>
-    <p:handoutMasterId r:id="rId9"/>
+    <p:handoutMasterId r:id="rId16"/>
   </p:handoutMasterIdLst>
   <p:sldIdLst>
-    <p:sldId id="1604" r:id="rId2"/>
-    <p:sldId id="1605" r:id="rId3"/>
-    <p:sldId id="1606" r:id="rId4"/>
-    <p:sldId id="1607" r:id="rId5"/>
-    <p:sldId id="1608" r:id="rId6"/>
-    <p:sldId id="1609" r:id="rId7"/>
+    <p:sldId id="391" r:id="rId2"/>
+    <p:sldId id="412" r:id="rId3"/>
+    <p:sldId id="594" r:id="rId4"/>
+    <p:sldId id="595" r:id="rId5"/>
+    <p:sldId id="596" r:id="rId6"/>
+    <p:sldId id="597" r:id="rId7"/>
+    <p:sldId id="598" r:id="rId8"/>
+    <p:sldId id="599" r:id="rId9"/>
+    <p:sldId id="600" r:id="rId10"/>
+    <p:sldId id="601" r:id="rId11"/>
+    <p:sldId id="602" r:id="rId12"/>
+    <p:sldId id="603" r:id="rId13"/>
+    <p:sldId id="604" r:id="rId14"/>
   </p:sldIdLst>
   <p:sldSz cx="12192000" cy="6858000"/>
   <p:notesSz cx="6858000" cy="9144000"/>
@@ -315,6 +322,11 @@
         </p:txBody>
       </p:sp>
     </p:spTree>
+    <p:extLst>
+      <p:ext uri="{BB962C8B-B14F-4D97-AF65-F5344CB8AC3E}">
+        <p14:creationId xmlns:p14="http://schemas.microsoft.com/office/powerpoint/2010/main" val="1"/>
+      </p:ext>
+    </p:extLst>
   </p:cSld>
   <p:clrMap bg1="lt1" tx1="dk1" bg2="lt2" tx2="dk2" accent1="accent1" accent2="accent2" accent3="accent3" accent4="accent4" accent5="accent5" accent6="accent6" hlink="hlink" folHlink="folHlink"/>
 </p:handoutMaster>
@@ -464,38 +476,37 @@
           <a:p>
             <a:pPr lvl="0"/>
             <a:r>
-              <a:rPr lang="zh-TW" altLang="en-US" smtClean="0"/>
+              <a:rPr lang="zh-TW" altLang="en-US"/>
               <a:t>按一下以編輯母片文字樣式</a:t>
             </a:r>
           </a:p>
           <a:p>
             <a:pPr lvl="1"/>
             <a:r>
-              <a:rPr lang="zh-TW" altLang="en-US" smtClean="0"/>
+              <a:rPr lang="zh-TW" altLang="en-US"/>
               <a:t>第二層</a:t>
             </a:r>
           </a:p>
           <a:p>
             <a:pPr lvl="2"/>
             <a:r>
-              <a:rPr lang="zh-TW" altLang="en-US" smtClean="0"/>
+              <a:rPr lang="zh-TW" altLang="en-US"/>
               <a:t>第三層</a:t>
             </a:r>
           </a:p>
           <a:p>
             <a:pPr lvl="3"/>
             <a:r>
-              <a:rPr lang="zh-TW" altLang="en-US" smtClean="0"/>
+              <a:rPr lang="zh-TW" altLang="en-US"/>
               <a:t>第四層</a:t>
             </a:r>
           </a:p>
           <a:p>
             <a:pPr lvl="4"/>
             <a:r>
-              <a:rPr lang="zh-TW" altLang="en-US" smtClean="0"/>
+              <a:rPr lang="zh-TW" altLang="en-US"/>
               <a:t>第五層</a:t>
             </a:r>
-            <a:endParaRPr lang="zh-TW" altLang="en-US"/>
           </a:p>
         </p:txBody>
       </p:sp>
@@ -701,7 +712,7 @@
           <a:lstStyle/>
           <a:p>
             <a:r>
-              <a:rPr lang="en-US" altLang="zh-TW" smtClean="0"/>
+              <a:rPr lang="en-US" altLang="zh-TW"/>
               <a:t>Click to edit Master title style</a:t>
             </a:r>
             <a:endParaRPr lang="zh-TW" altLang="en-US"/>
@@ -820,7 +831,7 @@
           </a:lstStyle>
           <a:p>
             <a:r>
-              <a:rPr lang="en-US" altLang="zh-TW" smtClean="0"/>
+              <a:rPr lang="en-US" altLang="zh-TW"/>
               <a:t>Click to edit Master subtitle style</a:t>
             </a:r>
             <a:endParaRPr lang="zh-TW" altLang="en-US"/>
@@ -943,7 +954,7 @@
           <a:lstStyle/>
           <a:p>
             <a:r>
-              <a:rPr lang="en-US" altLang="zh-TW" smtClean="0"/>
+              <a:rPr lang="en-US" altLang="zh-TW"/>
               <a:t>Click to edit Master title style</a:t>
             </a:r>
             <a:endParaRPr lang="zh-TW" altLang="en-US"/>
@@ -967,35 +978,35 @@
           <a:p>
             <a:pPr lvl="0"/>
             <a:r>
-              <a:rPr lang="en-US" altLang="zh-TW" smtClean="0"/>
+              <a:rPr lang="en-US" altLang="zh-TW"/>
               <a:t>Edit Master text styles</a:t>
             </a:r>
           </a:p>
           <a:p>
             <a:pPr lvl="1"/>
             <a:r>
-              <a:rPr lang="en-US" altLang="zh-TW" smtClean="0"/>
+              <a:rPr lang="en-US" altLang="zh-TW"/>
               <a:t>Second level</a:t>
             </a:r>
           </a:p>
           <a:p>
             <a:pPr lvl="2"/>
             <a:r>
-              <a:rPr lang="en-US" altLang="zh-TW" smtClean="0"/>
+              <a:rPr lang="en-US" altLang="zh-TW"/>
               <a:t>Third level</a:t>
             </a:r>
           </a:p>
           <a:p>
             <a:pPr lvl="3"/>
             <a:r>
-              <a:rPr lang="en-US" altLang="zh-TW" smtClean="0"/>
+              <a:rPr lang="en-US" altLang="zh-TW"/>
               <a:t>Fourth level</a:t>
             </a:r>
           </a:p>
           <a:p>
             <a:pPr lvl="4"/>
             <a:r>
-              <a:rPr lang="en-US" altLang="zh-TW" smtClean="0"/>
+              <a:rPr lang="en-US" altLang="zh-TW"/>
               <a:t>Fifth level</a:t>
             </a:r>
             <a:endParaRPr lang="zh-TW" altLang="en-US"/>
@@ -1123,7 +1134,7 @@
           <a:lstStyle/>
           <a:p>
             <a:r>
-              <a:rPr lang="en-US" altLang="zh-TW" smtClean="0"/>
+              <a:rPr lang="en-US" altLang="zh-TW"/>
               <a:t>Click to edit Master title style</a:t>
             </a:r>
             <a:endParaRPr lang="zh-TW" altLang="en-US"/>
@@ -1152,35 +1163,35 @@
           <a:p>
             <a:pPr lvl="0"/>
             <a:r>
-              <a:rPr lang="en-US" altLang="zh-TW" smtClean="0"/>
+              <a:rPr lang="en-US" altLang="zh-TW"/>
               <a:t>Edit Master text styles</a:t>
             </a:r>
           </a:p>
           <a:p>
             <a:pPr lvl="1"/>
             <a:r>
-              <a:rPr lang="en-US" altLang="zh-TW" smtClean="0"/>
+              <a:rPr lang="en-US" altLang="zh-TW"/>
               <a:t>Second level</a:t>
             </a:r>
           </a:p>
           <a:p>
             <a:pPr lvl="2"/>
             <a:r>
-              <a:rPr lang="en-US" altLang="zh-TW" smtClean="0"/>
+              <a:rPr lang="en-US" altLang="zh-TW"/>
               <a:t>Third level</a:t>
             </a:r>
           </a:p>
           <a:p>
             <a:pPr lvl="3"/>
             <a:r>
-              <a:rPr lang="en-US" altLang="zh-TW" smtClean="0"/>
+              <a:rPr lang="en-US" altLang="zh-TW"/>
               <a:t>Fourth level</a:t>
             </a:r>
           </a:p>
           <a:p>
             <a:pPr lvl="4"/>
             <a:r>
-              <a:rPr lang="en-US" altLang="zh-TW" smtClean="0"/>
+              <a:rPr lang="en-US" altLang="zh-TW"/>
               <a:t>Fifth level</a:t>
             </a:r>
             <a:endParaRPr lang="zh-TW" altLang="en-US"/>
@@ -1303,7 +1314,7 @@
           <a:lstStyle/>
           <a:p>
             <a:r>
-              <a:rPr lang="en-US" altLang="zh-TW" smtClean="0"/>
+              <a:rPr lang="en-US" altLang="zh-TW"/>
               <a:t>Click to edit Master title style</a:t>
             </a:r>
             <a:endParaRPr lang="zh-TW" altLang="en-US"/>
@@ -1327,35 +1338,35 @@
           <a:p>
             <a:pPr lvl="0"/>
             <a:r>
-              <a:rPr lang="en-US" altLang="zh-TW" smtClean="0"/>
+              <a:rPr lang="en-US" altLang="zh-TW"/>
               <a:t>Edit Master text styles</a:t>
             </a:r>
           </a:p>
           <a:p>
             <a:pPr lvl="1"/>
             <a:r>
-              <a:rPr lang="en-US" altLang="zh-TW" smtClean="0"/>
+              <a:rPr lang="en-US" altLang="zh-TW"/>
               <a:t>Second level</a:t>
             </a:r>
           </a:p>
           <a:p>
             <a:pPr lvl="2"/>
             <a:r>
-              <a:rPr lang="en-US" altLang="zh-TW" smtClean="0"/>
+              <a:rPr lang="en-US" altLang="zh-TW"/>
               <a:t>Third level</a:t>
             </a:r>
           </a:p>
           <a:p>
             <a:pPr lvl="3"/>
             <a:r>
-              <a:rPr lang="en-US" altLang="zh-TW" smtClean="0"/>
+              <a:rPr lang="en-US" altLang="zh-TW"/>
               <a:t>Fourth level</a:t>
             </a:r>
           </a:p>
           <a:p>
             <a:pPr lvl="4"/>
             <a:r>
-              <a:rPr lang="en-US" altLang="zh-TW" smtClean="0"/>
+              <a:rPr lang="en-US" altLang="zh-TW"/>
               <a:t>Fifth level</a:t>
             </a:r>
             <a:endParaRPr lang="zh-TW" altLang="en-US"/>
@@ -1487,7 +1498,7 @@
           </a:lstStyle>
           <a:p>
             <a:r>
-              <a:rPr lang="en-US" altLang="zh-TW" smtClean="0"/>
+              <a:rPr lang="en-US" altLang="zh-TW"/>
               <a:t>Click to edit Master title style</a:t>
             </a:r>
             <a:endParaRPr lang="zh-TW" altLang="en-US"/>
@@ -1607,7 +1618,7 @@
           <a:p>
             <a:pPr lvl="0"/>
             <a:r>
-              <a:rPr lang="en-US" altLang="zh-TW" smtClean="0"/>
+              <a:rPr lang="en-US" altLang="zh-TW"/>
               <a:t>Edit Master text styles</a:t>
             </a:r>
           </a:p>
@@ -1729,7 +1740,7 @@
           <a:lstStyle/>
           <a:p>
             <a:r>
-              <a:rPr lang="en-US" altLang="zh-TW" smtClean="0"/>
+              <a:rPr lang="en-US" altLang="zh-TW"/>
               <a:t>Click to edit Master title style</a:t>
             </a:r>
             <a:endParaRPr lang="zh-TW" altLang="en-US"/>
@@ -1786,35 +1797,35 @@
           <a:p>
             <a:pPr lvl="0"/>
             <a:r>
-              <a:rPr lang="en-US" altLang="zh-TW" smtClean="0"/>
+              <a:rPr lang="en-US" altLang="zh-TW"/>
               <a:t>Edit Master text styles</a:t>
             </a:r>
           </a:p>
           <a:p>
             <a:pPr lvl="1"/>
             <a:r>
-              <a:rPr lang="en-US" altLang="zh-TW" smtClean="0"/>
+              <a:rPr lang="en-US" altLang="zh-TW"/>
               <a:t>Second level</a:t>
             </a:r>
           </a:p>
           <a:p>
             <a:pPr lvl="2"/>
             <a:r>
-              <a:rPr lang="en-US" altLang="zh-TW" smtClean="0"/>
+              <a:rPr lang="en-US" altLang="zh-TW"/>
               <a:t>Third level</a:t>
             </a:r>
           </a:p>
           <a:p>
             <a:pPr lvl="3"/>
             <a:r>
-              <a:rPr lang="en-US" altLang="zh-TW" smtClean="0"/>
+              <a:rPr lang="en-US" altLang="zh-TW"/>
               <a:t>Fourth level</a:t>
             </a:r>
           </a:p>
           <a:p>
             <a:pPr lvl="4"/>
             <a:r>
-              <a:rPr lang="en-US" altLang="zh-TW" smtClean="0"/>
+              <a:rPr lang="en-US" altLang="zh-TW"/>
               <a:t>Fifth level</a:t>
             </a:r>
             <a:endParaRPr lang="zh-TW" altLang="en-US"/>
@@ -1871,35 +1882,35 @@
           <a:p>
             <a:pPr lvl="0"/>
             <a:r>
-              <a:rPr lang="en-US" altLang="zh-TW" smtClean="0"/>
+              <a:rPr lang="en-US" altLang="zh-TW"/>
               <a:t>Edit Master text styles</a:t>
             </a:r>
           </a:p>
           <a:p>
             <a:pPr lvl="1"/>
             <a:r>
-              <a:rPr lang="en-US" altLang="zh-TW" smtClean="0"/>
+              <a:rPr lang="en-US" altLang="zh-TW"/>
               <a:t>Second level</a:t>
             </a:r>
           </a:p>
           <a:p>
             <a:pPr lvl="2"/>
             <a:r>
-              <a:rPr lang="en-US" altLang="zh-TW" smtClean="0"/>
+              <a:rPr lang="en-US" altLang="zh-TW"/>
               <a:t>Third level</a:t>
             </a:r>
           </a:p>
           <a:p>
             <a:pPr lvl="3"/>
             <a:r>
-              <a:rPr lang="en-US" altLang="zh-TW" smtClean="0"/>
+              <a:rPr lang="en-US" altLang="zh-TW"/>
               <a:t>Fourth level</a:t>
             </a:r>
           </a:p>
           <a:p>
             <a:pPr lvl="4"/>
             <a:r>
-              <a:rPr lang="en-US" altLang="zh-TW" smtClean="0"/>
+              <a:rPr lang="en-US" altLang="zh-TW"/>
               <a:t>Fifth level</a:t>
             </a:r>
             <a:endParaRPr lang="zh-TW" altLang="en-US"/>
@@ -2026,7 +2037,7 @@
           </a:lstStyle>
           <a:p>
             <a:r>
-              <a:rPr lang="en-US" altLang="zh-TW" smtClean="0"/>
+              <a:rPr lang="en-US" altLang="zh-TW"/>
               <a:t>Click to edit Master title style</a:t>
             </a:r>
             <a:endParaRPr lang="zh-TW" altLang="en-US"/>
@@ -2092,7 +2103,7 @@
           <a:p>
             <a:pPr lvl="0"/>
             <a:r>
-              <a:rPr lang="en-US" altLang="zh-TW" smtClean="0"/>
+              <a:rPr lang="en-US" altLang="zh-TW"/>
               <a:t>Edit Master text styles</a:t>
             </a:r>
           </a:p>
@@ -2148,35 +2159,35 @@
           <a:p>
             <a:pPr lvl="0"/>
             <a:r>
-              <a:rPr lang="en-US" altLang="zh-TW" smtClean="0"/>
+              <a:rPr lang="en-US" altLang="zh-TW"/>
               <a:t>Edit Master text styles</a:t>
             </a:r>
           </a:p>
           <a:p>
             <a:pPr lvl="1"/>
             <a:r>
-              <a:rPr lang="en-US" altLang="zh-TW" smtClean="0"/>
+              <a:rPr lang="en-US" altLang="zh-TW"/>
               <a:t>Second level</a:t>
             </a:r>
           </a:p>
           <a:p>
             <a:pPr lvl="2"/>
             <a:r>
-              <a:rPr lang="en-US" altLang="zh-TW" smtClean="0"/>
+              <a:rPr lang="en-US" altLang="zh-TW"/>
               <a:t>Third level</a:t>
             </a:r>
           </a:p>
           <a:p>
             <a:pPr lvl="3"/>
             <a:r>
-              <a:rPr lang="en-US" altLang="zh-TW" smtClean="0"/>
+              <a:rPr lang="en-US" altLang="zh-TW"/>
               <a:t>Fourth level</a:t>
             </a:r>
           </a:p>
           <a:p>
             <a:pPr lvl="4"/>
             <a:r>
-              <a:rPr lang="en-US" altLang="zh-TW" smtClean="0"/>
+              <a:rPr lang="en-US" altLang="zh-TW"/>
               <a:t>Fifth level</a:t>
             </a:r>
             <a:endParaRPr lang="zh-TW" altLang="en-US"/>
@@ -2242,7 +2253,7 @@
           <a:p>
             <a:pPr lvl="0"/>
             <a:r>
-              <a:rPr lang="en-US" altLang="zh-TW" smtClean="0"/>
+              <a:rPr lang="en-US" altLang="zh-TW"/>
               <a:t>Edit Master text styles</a:t>
             </a:r>
           </a:p>
@@ -2298,35 +2309,35 @@
           <a:p>
             <a:pPr lvl="0"/>
             <a:r>
-              <a:rPr lang="en-US" altLang="zh-TW" smtClean="0"/>
+              <a:rPr lang="en-US" altLang="zh-TW"/>
               <a:t>Edit Master text styles</a:t>
             </a:r>
           </a:p>
           <a:p>
             <a:pPr lvl="1"/>
             <a:r>
-              <a:rPr lang="en-US" altLang="zh-TW" smtClean="0"/>
+              <a:rPr lang="en-US" altLang="zh-TW"/>
               <a:t>Second level</a:t>
             </a:r>
           </a:p>
           <a:p>
             <a:pPr lvl="2"/>
             <a:r>
-              <a:rPr lang="en-US" altLang="zh-TW" smtClean="0"/>
+              <a:rPr lang="en-US" altLang="zh-TW"/>
               <a:t>Third level</a:t>
             </a:r>
           </a:p>
           <a:p>
             <a:pPr lvl="3"/>
             <a:r>
-              <a:rPr lang="en-US" altLang="zh-TW" smtClean="0"/>
+              <a:rPr lang="en-US" altLang="zh-TW"/>
               <a:t>Fourth level</a:t>
             </a:r>
           </a:p>
           <a:p>
             <a:pPr lvl="4"/>
             <a:r>
-              <a:rPr lang="en-US" altLang="zh-TW" smtClean="0"/>
+              <a:rPr lang="en-US" altLang="zh-TW"/>
               <a:t>Fifth level</a:t>
             </a:r>
             <a:endParaRPr lang="zh-TW" altLang="en-US"/>
@@ -2449,7 +2460,7 @@
           <a:lstStyle/>
           <a:p>
             <a:r>
-              <a:rPr lang="en-US" altLang="zh-TW" smtClean="0"/>
+              <a:rPr lang="en-US" altLang="zh-TW"/>
               <a:t>Click to edit Master title style</a:t>
             </a:r>
             <a:endParaRPr lang="zh-TW" altLang="en-US"/>
@@ -2681,7 +2692,7 @@
           </a:lstStyle>
           <a:p>
             <a:r>
-              <a:rPr lang="en-US" altLang="zh-TW" smtClean="0"/>
+              <a:rPr lang="en-US" altLang="zh-TW"/>
               <a:t>Click to edit Master title style</a:t>
             </a:r>
             <a:endParaRPr lang="zh-TW" altLang="en-US"/>
@@ -2738,35 +2749,35 @@
           <a:p>
             <a:pPr lvl="0"/>
             <a:r>
-              <a:rPr lang="en-US" altLang="zh-TW" smtClean="0"/>
+              <a:rPr lang="en-US" altLang="zh-TW"/>
               <a:t>Edit Master text styles</a:t>
             </a:r>
           </a:p>
           <a:p>
             <a:pPr lvl="1"/>
             <a:r>
-              <a:rPr lang="en-US" altLang="zh-TW" smtClean="0"/>
+              <a:rPr lang="en-US" altLang="zh-TW"/>
               <a:t>Second level</a:t>
             </a:r>
           </a:p>
           <a:p>
             <a:pPr lvl="2"/>
             <a:r>
-              <a:rPr lang="en-US" altLang="zh-TW" smtClean="0"/>
+              <a:rPr lang="en-US" altLang="zh-TW"/>
               <a:t>Third level</a:t>
             </a:r>
           </a:p>
           <a:p>
             <a:pPr lvl="3"/>
             <a:r>
-              <a:rPr lang="en-US" altLang="zh-TW" smtClean="0"/>
+              <a:rPr lang="en-US" altLang="zh-TW"/>
               <a:t>Fourth level</a:t>
             </a:r>
           </a:p>
           <a:p>
             <a:pPr lvl="4"/>
             <a:r>
-              <a:rPr lang="en-US" altLang="zh-TW" smtClean="0"/>
+              <a:rPr lang="en-US" altLang="zh-TW"/>
               <a:t>Fifth level</a:t>
             </a:r>
             <a:endParaRPr lang="zh-TW" altLang="en-US"/>
@@ -2832,7 +2843,7 @@
           <a:p>
             <a:pPr lvl="0"/>
             <a:r>
-              <a:rPr lang="en-US" altLang="zh-TW" smtClean="0"/>
+              <a:rPr lang="en-US" altLang="zh-TW"/>
               <a:t>Edit Master text styles</a:t>
             </a:r>
           </a:p>
@@ -2963,7 +2974,7 @@
           </a:lstStyle>
           <a:p>
             <a:r>
-              <a:rPr lang="en-US" altLang="zh-TW" smtClean="0"/>
+              <a:rPr lang="en-US" altLang="zh-TW"/>
               <a:t>Click to edit Master title style</a:t>
             </a:r>
             <a:endParaRPr lang="zh-TW" altLang="en-US"/>
@@ -3028,7 +3039,7 @@
           </a:lstStyle>
           <a:p>
             <a:r>
-              <a:rPr lang="en-US" altLang="zh-TW" smtClean="0"/>
+              <a:rPr lang="en-US" altLang="zh-TW"/>
               <a:t>Click icon to add picture</a:t>
             </a:r>
             <a:endParaRPr lang="zh-TW" altLang="en-US"/>
@@ -3094,7 +3105,7 @@
           <a:p>
             <a:pPr lvl="0"/>
             <a:r>
-              <a:rPr lang="en-US" altLang="zh-TW" smtClean="0"/>
+              <a:rPr lang="en-US" altLang="zh-TW"/>
               <a:t>Edit Master text styles</a:t>
             </a:r>
           </a:p>
@@ -3236,10 +3247,9 @@
           <a:lstStyle/>
           <a:p>
             <a:r>
-              <a:rPr lang="zh-TW" altLang="en-US" smtClean="0"/>
+              <a:rPr lang="zh-TW" altLang="en-US"/>
               <a:t>按一下以編輯母片標題樣式</a:t>
             </a:r>
-            <a:endParaRPr lang="zh-TW" altLang="en-US"/>
           </a:p>
         </p:txBody>
       </p:sp>
@@ -3270,38 +3280,37 @@
           <a:p>
             <a:pPr lvl="0"/>
             <a:r>
-              <a:rPr lang="zh-TW" altLang="en-US" smtClean="0"/>
+              <a:rPr lang="zh-TW" altLang="en-US"/>
               <a:t>按一下以編輯母片文字樣式</a:t>
             </a:r>
           </a:p>
           <a:p>
             <a:pPr lvl="1"/>
             <a:r>
-              <a:rPr lang="zh-TW" altLang="en-US" smtClean="0"/>
+              <a:rPr lang="zh-TW" altLang="en-US"/>
               <a:t>第二層</a:t>
             </a:r>
           </a:p>
           <a:p>
             <a:pPr lvl="2"/>
             <a:r>
-              <a:rPr lang="zh-TW" altLang="en-US" smtClean="0"/>
+              <a:rPr lang="zh-TW" altLang="en-US"/>
               <a:t>第三層</a:t>
             </a:r>
           </a:p>
           <a:p>
             <a:pPr lvl="3"/>
             <a:r>
-              <a:rPr lang="zh-TW" altLang="en-US" smtClean="0"/>
+              <a:rPr lang="zh-TW" altLang="en-US"/>
               <a:t>第四層</a:t>
             </a:r>
           </a:p>
           <a:p>
             <a:pPr lvl="4"/>
             <a:r>
-              <a:rPr lang="zh-TW" altLang="en-US" smtClean="0"/>
+              <a:rPr lang="zh-TW" altLang="en-US"/>
               <a:t>第五層</a:t>
             </a:r>
-            <a:endParaRPr lang="zh-TW" altLang="en-US"/>
           </a:p>
         </p:txBody>
       </p:sp>
@@ -3722,7 +3731,7 @@
       </p:grpSpPr>
       <p:sp>
         <p:nvSpPr>
-          <p:cNvPr id="4" name="Title 3"/>
+          <p:cNvPr id="4" name="標題 3"/>
           <p:cNvSpPr>
             <a:spLocks noGrp="1"/>
           </p:cNvSpPr>
@@ -3730,196 +3739,663 @@
             <p:ph type="title"/>
           </p:nvPr>
         </p:nvSpPr>
-        <p:spPr/>
+        <p:spPr>
+          <a:xfrm>
+            <a:off x="0" y="2660915"/>
+            <a:ext cx="12192000" cy="1143000"/>
+          </a:xfrm>
+        </p:spPr>
         <p:txBody>
           <a:bodyPr>
+            <a:noAutofit/>
+          </a:bodyPr>
+          <a:lstStyle/>
+          <a:p>
+            <a:r>
+              <a:rPr lang="zh-CN" altLang="en-US" sz="5333" b="1" u="sng" dirty="0">
+                <a:solidFill>
+                  <a:srgbClr val="000066"/>
+                </a:solidFill>
+                <a:effectLst>
+                  <a:outerShdw blurRad="38100" dist="38100" dir="2700000" algn="tl">
+                    <a:srgbClr val="000000">
+                      <a:alpha val="43137"/>
+                    </a:srgbClr>
+                  </a:outerShdw>
+                </a:effectLst>
+                <a:latin typeface="微軟正黑體" pitchFamily="34" charset="-120"/>
+                <a:ea typeface="微軟正黑體" pitchFamily="34" charset="-120"/>
+              </a:rPr>
+              <a:t>宣道詩 </a:t>
+            </a:r>
+            <a:r>
+              <a:rPr lang="en-US" altLang="zh-CN" sz="5333" b="1" u="sng" dirty="0">
+                <a:solidFill>
+                  <a:srgbClr val="000066"/>
+                </a:solidFill>
+                <a:effectLst>
+                  <a:outerShdw blurRad="38100" dist="38100" dir="2700000" algn="tl">
+                    <a:srgbClr val="000000">
+                      <a:alpha val="43137"/>
+                    </a:srgbClr>
+                  </a:outerShdw>
+                </a:effectLst>
+                <a:latin typeface="微軟正黑體" pitchFamily="34" charset="-120"/>
+                <a:ea typeface="微軟正黑體" pitchFamily="34" charset="-120"/>
+              </a:rPr>
+              <a:t>238</a:t>
+            </a:r>
+            <a:br>
+              <a:rPr lang="en-US" altLang="zh-CN" sz="7200" b="1" i="1" dirty="0">
+                <a:solidFill>
+                  <a:srgbClr val="660033"/>
+                </a:solidFill>
+                <a:effectLst>
+                  <a:outerShdw blurRad="38100" dist="38100" dir="2700000" algn="tl">
+                    <a:srgbClr val="000000">
+                      <a:alpha val="43137"/>
+                    </a:srgbClr>
+                  </a:outerShdw>
+                </a:effectLst>
+                <a:latin typeface="微軟正黑體" pitchFamily="34" charset="-120"/>
+                <a:ea typeface="微軟正黑體" pitchFamily="34" charset="-120"/>
+              </a:rPr>
+            </a:br>
+            <a:r>
+              <a:rPr lang="zh-CN" altLang="en-US" sz="8000" b="1" dirty="0">
+                <a:solidFill>
+                  <a:srgbClr val="660033"/>
+                </a:solidFill>
+                <a:effectLst>
+                  <a:outerShdw blurRad="38100" dist="38100" dir="2700000" algn="tl">
+                    <a:srgbClr val="000000">
+                      <a:alpha val="43137"/>
+                    </a:srgbClr>
+                  </a:outerShdw>
+                </a:effectLst>
+                <a:latin typeface="微軟正黑體" pitchFamily="34" charset="-120"/>
+                <a:ea typeface="微軟正黑體" pitchFamily="34" charset="-120"/>
+              </a:rPr>
+              <a:t>榮耀釋放</a:t>
+            </a:r>
+            <a:endParaRPr lang="zh-TW" altLang="en-US" sz="8000" b="1" dirty="0">
+              <a:solidFill>
+                <a:srgbClr val="660033"/>
+              </a:solidFill>
+              <a:effectLst>
+                <a:outerShdw blurRad="38100" dist="38100" dir="2700000" algn="tl">
+                  <a:srgbClr val="000000">
+                    <a:alpha val="43137"/>
+                  </a:srgbClr>
+                </a:outerShdw>
+              </a:effectLst>
+              <a:latin typeface="微軟正黑體" pitchFamily="34" charset="-120"/>
+              <a:ea typeface="微軟正黑體" pitchFamily="34" charset="-120"/>
+            </a:endParaRPr>
+          </a:p>
+        </p:txBody>
+      </p:sp>
+    </p:spTree>
+    <p:extLst>
+      <p:ext uri="{BB962C8B-B14F-4D97-AF65-F5344CB8AC3E}">
+        <p14:creationId xmlns:p14="http://schemas.microsoft.com/office/powerpoint/2010/main" val="3724263107"/>
+      </p:ext>
+    </p:extLst>
+  </p:cSld>
+  <p:clrMapOvr>
+    <a:masterClrMapping/>
+  </p:clrMapOvr>
+</p:sld>
+</file>
+
+<file path=ppt/slides/slide10.xml><?xml version="1.0" encoding="utf-8"?>
+<p:sld xmlns:a="http://schemas.openxmlformats.org/drawingml/2006/main" xmlns:r="http://schemas.openxmlformats.org/officeDocument/2006/relationships" xmlns:p="http://schemas.openxmlformats.org/presentationml/2006/main">
+  <p:cSld>
+    <p:spTree>
+      <p:nvGrpSpPr>
+        <p:cNvPr id="1" name="">
+          <a:extLst>
+            <a:ext uri="{FF2B5EF4-FFF2-40B4-BE49-F238E27FC236}">
+              <a16:creationId xmlns:a16="http://schemas.microsoft.com/office/drawing/2014/main" id="{2C48335C-F599-01A2-8A27-DA3B572EE5D8}"/>
+            </a:ext>
+          </a:extLst>
+        </p:cNvPr>
+        <p:cNvGrpSpPr/>
+        <p:nvPr/>
+      </p:nvGrpSpPr>
+      <p:grpSpPr>
+        <a:xfrm>
+          <a:off x="0" y="0"/>
+          <a:ext cx="0" cy="0"/>
+          <a:chOff x="0" y="0"/>
+          <a:chExt cx="0" cy="0"/>
+        </a:xfrm>
+      </p:grpSpPr>
+      <p:sp>
+        <p:nvSpPr>
+          <p:cNvPr id="5" name="內容版面配置區 4">
+            <a:extLst>
+              <a:ext uri="{FF2B5EF4-FFF2-40B4-BE49-F238E27FC236}">
+                <a16:creationId xmlns:a16="http://schemas.microsoft.com/office/drawing/2014/main" id="{3F1627BC-2753-3CF1-60C3-76E16235DA8D}"/>
+              </a:ext>
+            </a:extLst>
+          </p:cNvPr>
+          <p:cNvSpPr>
+            <a:spLocks noGrp="1"/>
+          </p:cNvSpPr>
+          <p:nvPr>
+            <p:ph idx="1"/>
+          </p:nvPr>
+        </p:nvSpPr>
+        <p:spPr>
+          <a:xfrm>
+            <a:off x="0" y="2084851"/>
+            <a:ext cx="12192000" cy="2404863"/>
+          </a:xfrm>
+        </p:spPr>
+        <p:txBody>
+          <a:bodyPr anchor="ctr">
             <a:normAutofit/>
           </a:bodyPr>
           <a:lstStyle/>
           <a:p>
-            <a:r>
-              <a:rPr lang="en-US" altLang="zh-CN" sz="4800" b="1" dirty="0">
+            <a:pPr marL="0" indent="0" algn="ctr">
+              <a:buNone/>
+            </a:pPr>
+            <a:r>
+              <a:rPr lang="zh-CN" altLang="zh-TW" sz="6400" b="1" dirty="0">
                 <a:solidFill>
                   <a:srgbClr val="660033"/>
                 </a:solidFill>
                 <a:latin typeface="Microsoft JhengHei" panose="020B0604030504040204" pitchFamily="34" charset="-120"/>
                 <a:ea typeface="Microsoft JhengHei" panose="020B0604030504040204" pitchFamily="34" charset="-120"/>
               </a:rPr>
-              <a:t>【</a:t>
-            </a:r>
-            <a:r>
-              <a:rPr lang="zh-CN" altLang="en-US" sz="4800" b="1" dirty="0">
+              <a:t>主使我脫離驕傲和愚昧</a:t>
+            </a:r>
+          </a:p>
+          <a:p>
+            <a:pPr marL="0" indent="0" algn="ctr">
+              <a:buNone/>
+            </a:pPr>
+            <a:r>
+              <a:rPr lang="zh-CN" altLang="zh-TW" sz="6400" b="1" dirty="0">
                 <a:solidFill>
                   <a:srgbClr val="660033"/>
                 </a:solidFill>
                 <a:latin typeface="Microsoft JhengHei" panose="020B0604030504040204" pitchFamily="34" charset="-120"/>
                 <a:ea typeface="Microsoft JhengHei" panose="020B0604030504040204" pitchFamily="34" charset="-120"/>
               </a:rPr>
-              <a:t>榮耀釋放</a:t>
-            </a:r>
-            <a:r>
-              <a:rPr lang="en-US" altLang="zh-CN" sz="4800" b="1" dirty="0">
-                <a:solidFill>
-                  <a:srgbClr val="660033"/>
-                </a:solidFill>
-                <a:latin typeface="Microsoft JhengHei" panose="020B0604030504040204" pitchFamily="34" charset="-120"/>
-                <a:ea typeface="Microsoft JhengHei" panose="020B0604030504040204" pitchFamily="34" charset="-120"/>
-              </a:rPr>
-              <a:t>】</a:t>
-            </a:r>
-          </a:p>
-        </p:txBody>
-      </p:sp>
-      <p:sp>
-        <p:nvSpPr>
-          <p:cNvPr id="5" name="Content Placeholder 4"/>
-          <p:cNvSpPr>
-            <a:spLocks noGrp="1"/>
-          </p:cNvSpPr>
-          <p:nvPr>
-            <p:ph idx="1"/>
-          </p:nvPr>
-        </p:nvSpPr>
-        <p:spPr/>
-        <p:txBody>
-          <a:bodyPr>
-            <a:noAutofit/>
-          </a:bodyPr>
-          <a:lstStyle/>
-          <a:p>
-            <a:pPr marL="0" indent="0" algn="ctr">
-              <a:buNone/>
-            </a:pPr>
-            <a:r>
-              <a:rPr lang="zh-CN" altLang="zh-TW" sz="5400" b="1" dirty="0">
-                <a:solidFill>
-                  <a:srgbClr val="660033"/>
-                </a:solidFill>
-                <a:latin typeface="Microsoft JhengHei" panose="020B0604030504040204" pitchFamily="34" charset="-120"/>
-                <a:ea typeface="Microsoft JhengHei" panose="020B0604030504040204" pitchFamily="34" charset="-120"/>
-              </a:rPr>
-              <a:t>我曾被罪惡鎖鏈之捆綁</a:t>
-            </a:r>
-          </a:p>
-          <a:p>
-            <a:pPr marL="0" indent="0" algn="ctr">
-              <a:buNone/>
-            </a:pPr>
-            <a:r>
-              <a:rPr lang="zh-CN" altLang="zh-TW" sz="5400" b="1" dirty="0">
-                <a:solidFill>
-                  <a:srgbClr val="660033"/>
-                </a:solidFill>
-                <a:latin typeface="Microsoft JhengHei" panose="020B0604030504040204" pitchFamily="34" charset="-120"/>
-                <a:ea typeface="Microsoft JhengHei" panose="020B0604030504040204" pitchFamily="34" charset="-120"/>
-              </a:rPr>
-              <a:t>像</a:t>
-            </a:r>
-            <a:r>
-              <a:rPr lang="zh-CN" altLang="zh-TW" sz="5400" b="1" dirty="0" smtClean="0">
-                <a:solidFill>
-                  <a:srgbClr val="660033"/>
-                </a:solidFill>
-                <a:latin typeface="Microsoft JhengHei" panose="020B0604030504040204" pitchFamily="34" charset="-120"/>
-                <a:ea typeface="Microsoft JhengHei" panose="020B0604030504040204" pitchFamily="34" charset="-120"/>
-              </a:rPr>
-              <a:t>奴</a:t>
-            </a:r>
-            <a:r>
-              <a:rPr lang="zh-CN" altLang="en-US" sz="5400" b="1" dirty="0" smtClean="0">
-                <a:solidFill>
-                  <a:srgbClr val="660033"/>
-                </a:solidFill>
-                <a:latin typeface="Microsoft JhengHei" panose="020B0604030504040204" pitchFamily="34" charset="-120"/>
-                <a:ea typeface="Microsoft JhengHei" panose="020B0604030504040204" pitchFamily="34" charset="-120"/>
-              </a:rPr>
-              <a:t>不</a:t>
-            </a:r>
-            <a:r>
-              <a:rPr lang="zh-CN" altLang="en-US" sz="5400" b="1" dirty="0">
-                <a:solidFill>
-                  <a:srgbClr val="660033"/>
-                </a:solidFill>
-                <a:latin typeface="Microsoft JhengHei" panose="020B0604030504040204" pitchFamily="34" charset="-120"/>
-                <a:ea typeface="Microsoft JhengHei" panose="020B0604030504040204" pitchFamily="34" charset="-120"/>
-              </a:rPr>
-              <a:t>自由痛苦難當</a:t>
-            </a:r>
-          </a:p>
-          <a:p>
-            <a:pPr marL="0" indent="0" algn="ctr">
-              <a:buNone/>
-            </a:pPr>
-            <a:r>
-              <a:rPr lang="zh-CN" altLang="en-US" sz="5400" b="1" dirty="0">
-                <a:solidFill>
-                  <a:srgbClr val="660033"/>
-                </a:solidFill>
-                <a:latin typeface="Microsoft JhengHei" panose="020B0604030504040204" pitchFamily="34" charset="-120"/>
-                <a:ea typeface="Microsoft JhengHei" panose="020B0604030504040204" pitchFamily="34" charset="-120"/>
-              </a:rPr>
-              <a:t>但耶穌斷開我一切鎖鏈</a:t>
-            </a:r>
-          </a:p>
-          <a:p>
-            <a:pPr marL="0" indent="0" algn="ctr">
-              <a:buNone/>
-            </a:pPr>
-            <a:r>
-              <a:rPr lang="zh-CN" altLang="en-US" sz="5400" b="1" dirty="0">
-                <a:solidFill>
-                  <a:srgbClr val="660033"/>
-                </a:solidFill>
-                <a:latin typeface="Microsoft JhengHei" panose="020B0604030504040204" pitchFamily="34" charset="-120"/>
-                <a:ea typeface="Microsoft JhengHei" panose="020B0604030504040204" pitchFamily="34" charset="-120"/>
-              </a:rPr>
-              <a:t>榮耀之救恩使我釋放</a:t>
-            </a:r>
-          </a:p>
-        </p:txBody>
-      </p:sp>
-      <p:sp>
-        <p:nvSpPr>
-          <p:cNvPr id="6" name="Text Box 1"/>
+              <a:t>脫離我溺愛金錢迷惑</a:t>
+            </a:r>
+          </a:p>
+        </p:txBody>
+      </p:sp>
+      <p:sp>
+        <p:nvSpPr>
+          <p:cNvPr id="3" name="TextBox 2">
+            <a:extLst>
+              <a:ext uri="{FF2B5EF4-FFF2-40B4-BE49-F238E27FC236}">
+                <a16:creationId xmlns:a16="http://schemas.microsoft.com/office/drawing/2014/main" id="{71B126B3-BD3B-9D91-54B8-FC3F7EA347A7}"/>
+              </a:ext>
+            </a:extLst>
+          </p:cNvPr>
           <p:cNvSpPr txBox="1"/>
           <p:nvPr/>
         </p:nvSpPr>
         <p:spPr>
           <a:xfrm>
-            <a:off x="767408" y="1700808"/>
-            <a:ext cx="1055440" cy="923330"/>
+            <a:off x="0" y="5061182"/>
+            <a:ext cx="12192000" cy="584775"/>
           </a:xfrm>
           <a:prstGeom prst="rect">
             <a:avLst/>
           </a:prstGeom>
           <a:noFill/>
-          <a:ln w="9525">
-            <a:noFill/>
-            <a:miter lim="800000"/>
-          </a:ln>
         </p:spPr>
         <p:txBody>
-          <a:bodyPr wrap="square">
+          <a:bodyPr wrap="square" rtlCol="0">
             <a:spAutoFit/>
           </a:bodyPr>
           <a:lstStyle/>
           <a:p>
             <a:pPr algn="ctr"/>
             <a:r>
-              <a:rPr lang="en-US" sz="5400" b="1" dirty="0">
+              <a:rPr lang="en-US" sz="3200" b="1" dirty="0">
                 <a:solidFill>
                   <a:srgbClr val="660033"/>
                 </a:solidFill>
               </a:rPr>
-              <a:t>1.</a:t>
-            </a:r>
+              <a:t>( 3 / 3 )</a:t>
+            </a:r>
+            <a:endParaRPr lang="vi-VN" sz="3200" b="1" dirty="0">
+              <a:solidFill>
+                <a:srgbClr val="660033"/>
+              </a:solidFill>
+            </a:endParaRPr>
           </a:p>
         </p:txBody>
       </p:sp>
     </p:spTree>
     <p:extLst>
       <p:ext uri="{BB962C8B-B14F-4D97-AF65-F5344CB8AC3E}">
-        <p14:creationId xmlns:p14="http://schemas.microsoft.com/office/powerpoint/2010/main" val="993445150"/>
+        <p14:creationId xmlns:p14="http://schemas.microsoft.com/office/powerpoint/2010/main" val="1960036484"/>
+      </p:ext>
+    </p:extLst>
+  </p:cSld>
+  <p:clrMapOvr>
+    <a:masterClrMapping/>
+  </p:clrMapOvr>
+</p:sld>
+</file>
+
+<file path=ppt/slides/slide11.xml><?xml version="1.0" encoding="utf-8"?>
+<p:sld xmlns:a="http://schemas.openxmlformats.org/drawingml/2006/main" xmlns:r="http://schemas.openxmlformats.org/officeDocument/2006/relationships" xmlns:p="http://schemas.openxmlformats.org/presentationml/2006/main">
+  <p:cSld>
+    <p:spTree>
+      <p:nvGrpSpPr>
+        <p:cNvPr id="1" name="">
+          <a:extLst>
+            <a:ext uri="{FF2B5EF4-FFF2-40B4-BE49-F238E27FC236}">
+              <a16:creationId xmlns:a16="http://schemas.microsoft.com/office/drawing/2014/main" id="{3EA46335-BD3B-2F42-4553-E5CBB66E8618}"/>
+            </a:ext>
+          </a:extLst>
+        </p:cNvPr>
+        <p:cNvGrpSpPr/>
+        <p:nvPr/>
+      </p:nvGrpSpPr>
+      <p:grpSpPr>
+        <a:xfrm>
+          <a:off x="0" y="0"/>
+          <a:ext cx="0" cy="0"/>
+          <a:chOff x="0" y="0"/>
+          <a:chExt cx="0" cy="0"/>
+        </a:xfrm>
+      </p:grpSpPr>
+      <p:sp>
+        <p:nvSpPr>
+          <p:cNvPr id="5" name="內容版面配置區 4">
+            <a:extLst>
+              <a:ext uri="{FF2B5EF4-FFF2-40B4-BE49-F238E27FC236}">
+                <a16:creationId xmlns:a16="http://schemas.microsoft.com/office/drawing/2014/main" id="{81409273-4EFF-1036-B49B-C0365C1FAF3C}"/>
+              </a:ext>
+            </a:extLst>
+          </p:cNvPr>
+          <p:cNvSpPr>
+            <a:spLocks noGrp="1"/>
+          </p:cNvSpPr>
+          <p:nvPr>
+            <p:ph idx="1"/>
+          </p:nvPr>
+        </p:nvSpPr>
+        <p:spPr>
+          <a:xfrm>
+            <a:off x="0" y="2084851"/>
+            <a:ext cx="12192000" cy="2404863"/>
+          </a:xfrm>
+        </p:spPr>
+        <p:txBody>
+          <a:bodyPr anchor="ctr">
+            <a:normAutofit/>
+          </a:bodyPr>
+          <a:lstStyle/>
+          <a:p>
+            <a:pPr marL="0" indent="0" algn="ctr">
+              <a:buNone/>
+            </a:pPr>
+            <a:r>
+              <a:rPr lang="zh-CN" altLang="zh-TW" sz="6400" b="1" dirty="0">
+                <a:solidFill>
+                  <a:srgbClr val="660033"/>
+                </a:solidFill>
+                <a:latin typeface="Microsoft JhengHei" panose="020B0604030504040204" pitchFamily="34" charset="-120"/>
+                <a:ea typeface="Microsoft JhengHei" panose="020B0604030504040204" pitchFamily="34" charset="-120"/>
+              </a:rPr>
+              <a:t>脫離我惱怒暴躁之性情</a:t>
+            </a:r>
+          </a:p>
+          <a:p>
+            <a:pPr marL="0" indent="0" algn="ctr">
+              <a:buNone/>
+            </a:pPr>
+            <a:r>
+              <a:rPr lang="zh-CN" altLang="zh-TW" sz="6400" b="1" dirty="0">
+                <a:solidFill>
+                  <a:srgbClr val="660033"/>
+                </a:solidFill>
+                <a:latin typeface="Microsoft JhengHei" panose="020B0604030504040204" pitchFamily="34" charset="-120"/>
+                <a:ea typeface="Microsoft JhengHei" panose="020B0604030504040204" pitchFamily="34" charset="-120"/>
+              </a:rPr>
+              <a:t>榮耀之釋放無窮喜樂</a:t>
+            </a:r>
+          </a:p>
+        </p:txBody>
+      </p:sp>
+      <p:sp>
+        <p:nvSpPr>
+          <p:cNvPr id="3" name="TextBox 2">
+            <a:extLst>
+              <a:ext uri="{FF2B5EF4-FFF2-40B4-BE49-F238E27FC236}">
+                <a16:creationId xmlns:a16="http://schemas.microsoft.com/office/drawing/2014/main" id="{039571FC-F1FB-A6E5-DD9D-8C6DA9B095AE}"/>
+              </a:ext>
+            </a:extLst>
+          </p:cNvPr>
+          <p:cNvSpPr txBox="1"/>
+          <p:nvPr/>
+        </p:nvSpPr>
+        <p:spPr>
+          <a:xfrm>
+            <a:off x="0" y="5061182"/>
+            <a:ext cx="12192000" cy="584775"/>
+          </a:xfrm>
+          <a:prstGeom prst="rect">
+            <a:avLst/>
+          </a:prstGeom>
+          <a:noFill/>
+        </p:spPr>
+        <p:txBody>
+          <a:bodyPr wrap="square" rtlCol="0">
+            <a:spAutoFit/>
+          </a:bodyPr>
+          <a:lstStyle/>
+          <a:p>
+            <a:pPr algn="ctr"/>
+            <a:r>
+              <a:rPr lang="en-US" sz="3200" b="1" dirty="0">
+                <a:solidFill>
+                  <a:srgbClr val="660033"/>
+                </a:solidFill>
+              </a:rPr>
+              <a:t>( 3 / 3 )</a:t>
+            </a:r>
+            <a:endParaRPr lang="vi-VN" sz="3200" b="1" dirty="0">
+              <a:solidFill>
+                <a:srgbClr val="660033"/>
+              </a:solidFill>
+            </a:endParaRPr>
+          </a:p>
+        </p:txBody>
+      </p:sp>
+    </p:spTree>
+    <p:extLst>
+      <p:ext uri="{BB962C8B-B14F-4D97-AF65-F5344CB8AC3E}">
+        <p14:creationId xmlns:p14="http://schemas.microsoft.com/office/powerpoint/2010/main" val="2022826639"/>
+      </p:ext>
+    </p:extLst>
+  </p:cSld>
+  <p:clrMapOvr>
+    <a:masterClrMapping/>
+  </p:clrMapOvr>
+</p:sld>
+</file>
+
+<file path=ppt/slides/slide12.xml><?xml version="1.0" encoding="utf-8"?>
+<p:sld xmlns:a="http://schemas.openxmlformats.org/drawingml/2006/main" xmlns:r="http://schemas.openxmlformats.org/officeDocument/2006/relationships" xmlns:p="http://schemas.openxmlformats.org/presentationml/2006/main">
+  <p:cSld>
+    <p:spTree>
+      <p:nvGrpSpPr>
+        <p:cNvPr id="1" name="">
+          <a:extLst>
+            <a:ext uri="{FF2B5EF4-FFF2-40B4-BE49-F238E27FC236}">
+              <a16:creationId xmlns:a16="http://schemas.microsoft.com/office/drawing/2014/main" id="{39E2F0A7-1314-CC14-4C61-51B5D98560F0}"/>
+            </a:ext>
+          </a:extLst>
+        </p:cNvPr>
+        <p:cNvGrpSpPr/>
+        <p:nvPr/>
+      </p:nvGrpSpPr>
+      <p:grpSpPr>
+        <a:xfrm>
+          <a:off x="0" y="0"/>
+          <a:ext cx="0" cy="0"/>
+          <a:chOff x="0" y="0"/>
+          <a:chExt cx="0" cy="0"/>
+        </a:xfrm>
+      </p:grpSpPr>
+      <p:sp>
+        <p:nvSpPr>
+          <p:cNvPr id="5" name="內容版面配置區 4">
+            <a:extLst>
+              <a:ext uri="{FF2B5EF4-FFF2-40B4-BE49-F238E27FC236}">
+                <a16:creationId xmlns:a16="http://schemas.microsoft.com/office/drawing/2014/main" id="{11ADFF64-8DC0-89B0-AD84-4CDB84F5BF89}"/>
+              </a:ext>
+            </a:extLst>
+          </p:cNvPr>
+          <p:cNvSpPr>
+            <a:spLocks noGrp="1"/>
+          </p:cNvSpPr>
+          <p:nvPr>
+            <p:ph idx="1"/>
+          </p:nvPr>
+        </p:nvSpPr>
+        <p:spPr>
+          <a:xfrm>
+            <a:off x="0" y="2084851"/>
+            <a:ext cx="12192000" cy="2404863"/>
+          </a:xfrm>
+        </p:spPr>
+        <p:txBody>
+          <a:bodyPr anchor="ctr">
+            <a:normAutofit/>
+          </a:bodyPr>
+          <a:lstStyle/>
+          <a:p>
+            <a:pPr marL="0" indent="0" algn="ctr">
+              <a:buNone/>
+            </a:pPr>
+            <a:r>
+              <a:rPr lang="zh-CN" altLang="zh-TW" sz="6400" b="1" dirty="0">
+                <a:solidFill>
+                  <a:srgbClr val="660033"/>
+                </a:solidFill>
+                <a:latin typeface="Microsoft JhengHei" panose="020B0604030504040204" pitchFamily="34" charset="-120"/>
+                <a:ea typeface="Microsoft JhengHei" panose="020B0604030504040204" pitchFamily="34" charset="-120"/>
+              </a:rPr>
+              <a:t>榮耀之釋放</a:t>
+            </a:r>
+            <a:r>
+              <a:rPr lang="en-US" altLang="zh-CN" sz="6400" b="1" dirty="0">
+                <a:solidFill>
+                  <a:srgbClr val="660033"/>
+                </a:solidFill>
+                <a:latin typeface="Microsoft JhengHei" panose="020B0604030504040204" pitchFamily="34" charset="-120"/>
+                <a:ea typeface="Microsoft JhengHei" panose="020B0604030504040204" pitchFamily="34" charset="-120"/>
+              </a:rPr>
+              <a:t>  </a:t>
+            </a:r>
+            <a:r>
+              <a:rPr lang="zh-CN" altLang="zh-TW" sz="6400" b="1" dirty="0">
+                <a:solidFill>
+                  <a:srgbClr val="660033"/>
+                </a:solidFill>
+                <a:latin typeface="Microsoft JhengHei" panose="020B0604030504040204" pitchFamily="34" charset="-120"/>
+                <a:ea typeface="Microsoft JhengHei" panose="020B0604030504040204" pitchFamily="34" charset="-120"/>
+              </a:rPr>
+              <a:t>奇妙之釋放</a:t>
+            </a:r>
+          </a:p>
+          <a:p>
+            <a:pPr marL="0" indent="0" algn="ctr">
+              <a:buNone/>
+            </a:pPr>
+            <a:r>
+              <a:rPr lang="zh-CN" altLang="zh-TW" sz="6400" b="1" dirty="0">
+                <a:solidFill>
+                  <a:srgbClr val="660033"/>
+                </a:solidFill>
+                <a:latin typeface="Microsoft JhengHei" panose="020B0604030504040204" pitchFamily="34" charset="-120"/>
+                <a:ea typeface="Microsoft JhengHei" panose="020B0604030504040204" pitchFamily="34" charset="-120"/>
+              </a:rPr>
+              <a:t>我再無罪惡</a:t>
+            </a:r>
+            <a:r>
+              <a:rPr lang="en-US" altLang="zh-CN" sz="6400" b="1" dirty="0">
+                <a:solidFill>
+                  <a:srgbClr val="660033"/>
+                </a:solidFill>
+                <a:latin typeface="Microsoft JhengHei" panose="020B0604030504040204" pitchFamily="34" charset="-120"/>
+                <a:ea typeface="Microsoft JhengHei" panose="020B0604030504040204" pitchFamily="34" charset="-120"/>
+              </a:rPr>
+              <a:t>  </a:t>
+            </a:r>
+            <a:r>
+              <a:rPr lang="zh-CN" altLang="zh-TW" sz="6400" b="1" dirty="0">
+                <a:solidFill>
+                  <a:srgbClr val="660033"/>
+                </a:solidFill>
+                <a:latin typeface="Microsoft JhengHei" panose="020B0604030504040204" pitchFamily="34" charset="-120"/>
+                <a:ea typeface="Microsoft JhengHei" panose="020B0604030504040204" pitchFamily="34" charset="-120"/>
+              </a:rPr>
+              <a:t>束縛痛苦</a:t>
+            </a:r>
+            <a:endParaRPr lang="en-US" altLang="zh-CN" sz="6400" b="1" dirty="0">
+              <a:solidFill>
+                <a:srgbClr val="660033"/>
+              </a:solidFill>
+              <a:latin typeface="Microsoft JhengHei" panose="020B0604030504040204" pitchFamily="34" charset="-120"/>
+              <a:ea typeface="Microsoft JhengHei" panose="020B0604030504040204" pitchFamily="34" charset="-120"/>
+            </a:endParaRPr>
+          </a:p>
+        </p:txBody>
+      </p:sp>
+    </p:spTree>
+    <p:extLst>
+      <p:ext uri="{BB962C8B-B14F-4D97-AF65-F5344CB8AC3E}">
+        <p14:creationId xmlns:p14="http://schemas.microsoft.com/office/powerpoint/2010/main" val="1798035140"/>
+      </p:ext>
+    </p:extLst>
+  </p:cSld>
+  <p:clrMapOvr>
+    <a:masterClrMapping/>
+  </p:clrMapOvr>
+</p:sld>
+</file>
+
+<file path=ppt/slides/slide13.xml><?xml version="1.0" encoding="utf-8"?>
+<p:sld xmlns:a="http://schemas.openxmlformats.org/drawingml/2006/main" xmlns:r="http://schemas.openxmlformats.org/officeDocument/2006/relationships" xmlns:p="http://schemas.openxmlformats.org/presentationml/2006/main">
+  <p:cSld>
+    <p:spTree>
+      <p:nvGrpSpPr>
+        <p:cNvPr id="1" name="">
+          <a:extLst>
+            <a:ext uri="{FF2B5EF4-FFF2-40B4-BE49-F238E27FC236}">
+              <a16:creationId xmlns:a16="http://schemas.microsoft.com/office/drawing/2014/main" id="{94ED9A5D-F1C2-E598-AC65-239282DD36A7}"/>
+            </a:ext>
+          </a:extLst>
+        </p:cNvPr>
+        <p:cNvGrpSpPr/>
+        <p:nvPr/>
+      </p:nvGrpSpPr>
+      <p:grpSpPr>
+        <a:xfrm>
+          <a:off x="0" y="0"/>
+          <a:ext cx="0" cy="0"/>
+          <a:chOff x="0" y="0"/>
+          <a:chExt cx="0" cy="0"/>
+        </a:xfrm>
+      </p:grpSpPr>
+      <p:sp>
+        <p:nvSpPr>
+          <p:cNvPr id="5" name="內容版面配置區 4">
+            <a:extLst>
+              <a:ext uri="{FF2B5EF4-FFF2-40B4-BE49-F238E27FC236}">
+                <a16:creationId xmlns:a16="http://schemas.microsoft.com/office/drawing/2014/main" id="{6ECB0F84-2C50-BAF7-EBAC-0183570FD37D}"/>
+              </a:ext>
+            </a:extLst>
+          </p:cNvPr>
+          <p:cNvSpPr>
+            <a:spLocks noGrp="1"/>
+          </p:cNvSpPr>
+          <p:nvPr>
+            <p:ph idx="1"/>
+          </p:nvPr>
+        </p:nvSpPr>
+        <p:spPr>
+          <a:xfrm>
+            <a:off x="0" y="2084851"/>
+            <a:ext cx="12192000" cy="2404863"/>
+          </a:xfrm>
+        </p:spPr>
+        <p:txBody>
+          <a:bodyPr anchor="ctr">
+            <a:normAutofit/>
+          </a:bodyPr>
+          <a:lstStyle/>
+          <a:p>
+            <a:pPr marL="0" indent="0" algn="ctr">
+              <a:buNone/>
+            </a:pPr>
+            <a:r>
+              <a:rPr lang="zh-CN" altLang="zh-TW" sz="6400" b="1" dirty="0">
+                <a:solidFill>
+                  <a:srgbClr val="660033"/>
+                </a:solidFill>
+                <a:latin typeface="Microsoft JhengHei" panose="020B0604030504040204" pitchFamily="34" charset="-120"/>
+                <a:ea typeface="Microsoft JhengHei" panose="020B0604030504040204" pitchFamily="34" charset="-120"/>
+              </a:rPr>
+              <a:t>榮耀釋放者</a:t>
+            </a:r>
+            <a:r>
+              <a:rPr lang="en-US" altLang="zh-CN" sz="6400" b="1" dirty="0">
+                <a:solidFill>
+                  <a:srgbClr val="660033"/>
+                </a:solidFill>
+                <a:latin typeface="Microsoft JhengHei" panose="020B0604030504040204" pitchFamily="34" charset="-120"/>
+                <a:ea typeface="Microsoft JhengHei" panose="020B0604030504040204" pitchFamily="34" charset="-120"/>
+              </a:rPr>
+              <a:t>  </a:t>
+            </a:r>
+            <a:r>
+              <a:rPr lang="zh-CN" altLang="zh-TW" sz="6400" b="1" dirty="0">
+                <a:solidFill>
+                  <a:srgbClr val="660033"/>
+                </a:solidFill>
+                <a:latin typeface="Microsoft JhengHei" panose="020B0604030504040204" pitchFamily="34" charset="-120"/>
+                <a:ea typeface="Microsoft JhengHei" panose="020B0604030504040204" pitchFamily="34" charset="-120"/>
+              </a:rPr>
+              <a:t>是救主耶穌</a:t>
+            </a:r>
+          </a:p>
+          <a:p>
+            <a:pPr marL="0" indent="0" algn="ctr">
+              <a:buNone/>
+            </a:pPr>
+            <a:r>
+              <a:rPr lang="zh-CN" altLang="zh-TW" sz="6400" b="1" dirty="0">
+                <a:solidFill>
+                  <a:srgbClr val="660033"/>
+                </a:solidFill>
+                <a:latin typeface="Microsoft JhengHei" panose="020B0604030504040204" pitchFamily="34" charset="-120"/>
+                <a:ea typeface="Microsoft JhengHei" panose="020B0604030504040204" pitchFamily="34" charset="-120"/>
+              </a:rPr>
+              <a:t>從今到永遠</a:t>
+            </a:r>
+            <a:r>
+              <a:rPr lang="en-US" altLang="zh-CN" sz="6400" b="1" dirty="0">
+                <a:solidFill>
+                  <a:srgbClr val="660033"/>
+                </a:solidFill>
+                <a:latin typeface="Microsoft JhengHei" panose="020B0604030504040204" pitchFamily="34" charset="-120"/>
+                <a:ea typeface="Microsoft JhengHei" panose="020B0604030504040204" pitchFamily="34" charset="-120"/>
+              </a:rPr>
+              <a:t>  </a:t>
+            </a:r>
+            <a:r>
+              <a:rPr lang="zh-CN" altLang="zh-TW" sz="6400" b="1" dirty="0">
+                <a:solidFill>
+                  <a:srgbClr val="660033"/>
+                </a:solidFill>
+                <a:latin typeface="Microsoft JhengHei" panose="020B0604030504040204" pitchFamily="34" charset="-120"/>
+                <a:ea typeface="Microsoft JhengHei" panose="020B0604030504040204" pitchFamily="34" charset="-120"/>
+              </a:rPr>
+              <a:t>使我釋放</a:t>
+            </a:r>
+          </a:p>
+        </p:txBody>
+      </p:sp>
+    </p:spTree>
+    <p:extLst>
+      <p:ext uri="{BB962C8B-B14F-4D97-AF65-F5344CB8AC3E}">
+        <p14:creationId xmlns:p14="http://schemas.microsoft.com/office/powerpoint/2010/main" val="1715936401"/>
       </p:ext>
     </p:extLst>
   </p:cSld>
@@ -3948,322 +4424,102 @@
       </p:grpSpPr>
       <p:sp>
         <p:nvSpPr>
-          <p:cNvPr id="4" name="Title 3"/>
-          <p:cNvSpPr>
-            <a:spLocks noGrp="1"/>
-          </p:cNvSpPr>
-          <p:nvPr>
-            <p:ph type="title"/>
-          </p:nvPr>
-        </p:nvSpPr>
-        <p:spPr/>
-        <p:txBody>
-          <a:bodyPr>
+          <p:cNvPr id="5" name="內容版面配置區 4"/>
+          <p:cNvSpPr>
+            <a:spLocks noGrp="1"/>
+          </p:cNvSpPr>
+          <p:nvPr>
+            <p:ph idx="1"/>
+          </p:nvPr>
+        </p:nvSpPr>
+        <p:spPr>
+          <a:xfrm>
+            <a:off x="0" y="2084851"/>
+            <a:ext cx="12192000" cy="2404863"/>
+          </a:xfrm>
+        </p:spPr>
+        <p:txBody>
+          <a:bodyPr anchor="ctr">
             <a:normAutofit/>
           </a:bodyPr>
           <a:lstStyle/>
           <a:p>
-            <a:r>
-              <a:rPr lang="en-US" altLang="zh-CN" sz="4800" b="1" dirty="0">
+            <a:pPr marL="0" indent="0" algn="ctr">
+              <a:buNone/>
+            </a:pPr>
+            <a:r>
+              <a:rPr lang="zh-CN" altLang="zh-TW" sz="6400" b="1" dirty="0">
                 <a:solidFill>
                   <a:srgbClr val="660033"/>
                 </a:solidFill>
                 <a:latin typeface="Microsoft JhengHei" panose="020B0604030504040204" pitchFamily="34" charset="-120"/>
                 <a:ea typeface="Microsoft JhengHei" panose="020B0604030504040204" pitchFamily="34" charset="-120"/>
               </a:rPr>
-              <a:t>【</a:t>
-            </a:r>
-            <a:r>
-              <a:rPr lang="zh-CN" altLang="en-US" sz="4800" b="1" dirty="0">
+              <a:t>我曾被罪惡鎖鏈之捆綁</a:t>
+            </a:r>
+          </a:p>
+          <a:p>
+            <a:pPr marL="0" indent="0" algn="ctr">
+              <a:buNone/>
+            </a:pPr>
+            <a:r>
+              <a:rPr lang="zh-CN" altLang="zh-TW" sz="6400" b="1" dirty="0">
                 <a:solidFill>
                   <a:srgbClr val="660033"/>
                 </a:solidFill>
                 <a:latin typeface="Microsoft JhengHei" panose="020B0604030504040204" pitchFamily="34" charset="-120"/>
                 <a:ea typeface="Microsoft JhengHei" panose="020B0604030504040204" pitchFamily="34" charset="-120"/>
               </a:rPr>
-              <a:t>榮耀釋放</a:t>
-            </a:r>
-            <a:r>
-              <a:rPr lang="en-US" altLang="zh-CN" sz="4800" b="1" dirty="0">
+              <a:t>像奴</a:t>
+            </a:r>
+            <a:r>
+              <a:rPr lang="zh-CN" altLang="en-US" sz="6400" b="1" dirty="0">
                 <a:solidFill>
                   <a:srgbClr val="660033"/>
                 </a:solidFill>
                 <a:latin typeface="Microsoft JhengHei" panose="020B0604030504040204" pitchFamily="34" charset="-120"/>
                 <a:ea typeface="Microsoft JhengHei" panose="020B0604030504040204" pitchFamily="34" charset="-120"/>
               </a:rPr>
-              <a:t>】</a:t>
-            </a:r>
-          </a:p>
-        </p:txBody>
-      </p:sp>
-      <p:sp>
-        <p:nvSpPr>
-          <p:cNvPr id="5" name="Content Placeholder 4"/>
-          <p:cNvSpPr>
-            <a:spLocks noGrp="1"/>
-          </p:cNvSpPr>
-          <p:nvPr>
-            <p:ph idx="1"/>
-          </p:nvPr>
-        </p:nvSpPr>
-        <p:spPr/>
-        <p:txBody>
-          <a:bodyPr>
-            <a:noAutofit/>
+              <a:t>不自由痛苦難當</a:t>
+            </a:r>
+          </a:p>
+        </p:txBody>
+      </p:sp>
+      <p:sp>
+        <p:nvSpPr>
+          <p:cNvPr id="3" name="TextBox 2"/>
+          <p:cNvSpPr txBox="1"/>
+          <p:nvPr/>
+        </p:nvSpPr>
+        <p:spPr>
+          <a:xfrm>
+            <a:off x="0" y="5061182"/>
+            <a:ext cx="12192000" cy="584775"/>
+          </a:xfrm>
+          <a:prstGeom prst="rect">
+            <a:avLst/>
+          </a:prstGeom>
+          <a:noFill/>
+        </p:spPr>
+        <p:txBody>
+          <a:bodyPr wrap="square" rtlCol="0">
+            <a:spAutoFit/>
           </a:bodyPr>
           <a:lstStyle/>
           <a:p>
-            <a:pPr marL="0" indent="0" algn="ctr">
-              <a:buNone/>
-            </a:pPr>
-            <a:r>
-              <a:rPr lang="zh-CN" altLang="zh-TW" sz="5400" b="1" dirty="0">
+            <a:pPr algn="ctr"/>
+            <a:r>
+              <a:rPr lang="en-US" sz="3200" b="1" dirty="0">
                 <a:solidFill>
                   <a:srgbClr val="660033"/>
                 </a:solidFill>
-                <a:latin typeface="Microsoft JhengHei" panose="020B0604030504040204" pitchFamily="34" charset="-120"/>
-                <a:ea typeface="Microsoft JhengHei" panose="020B0604030504040204" pitchFamily="34" charset="-120"/>
               </a:rPr>
-              <a:t>榮耀之釋</a:t>
-            </a:r>
-            <a:r>
-              <a:rPr lang="zh-CN" altLang="zh-TW" sz="5400" b="1" dirty="0">
-                <a:solidFill>
-                  <a:srgbClr val="660033"/>
-                </a:solidFill>
-                <a:latin typeface="Microsoft JhengHei" panose="020B0604030504040204" pitchFamily="34" charset="-120"/>
-                <a:ea typeface="Microsoft JhengHei" panose="020B0604030504040204" pitchFamily="34" charset="-120"/>
-              </a:rPr>
-              <a:t>放</a:t>
-            </a:r>
-            <a:r>
-              <a:rPr lang="en-US" altLang="zh-CN" sz="5400" b="1" dirty="0">
-                <a:solidFill>
-                  <a:srgbClr val="660033"/>
-                </a:solidFill>
-                <a:latin typeface="Microsoft JhengHei" panose="020B0604030504040204" pitchFamily="34" charset="-120"/>
-                <a:ea typeface="Microsoft JhengHei" panose="020B0604030504040204" pitchFamily="34" charset="-120"/>
-              </a:rPr>
-              <a:t>  </a:t>
-            </a:r>
-            <a:r>
-              <a:rPr lang="zh-CN" altLang="zh-TW" sz="5400" b="1" dirty="0">
-                <a:solidFill>
-                  <a:srgbClr val="660033"/>
-                </a:solidFill>
-                <a:latin typeface="Microsoft JhengHei" panose="020B0604030504040204" pitchFamily="34" charset="-120"/>
-                <a:ea typeface="Microsoft JhengHei" panose="020B0604030504040204" pitchFamily="34" charset="-120"/>
-              </a:rPr>
-              <a:t>奇</a:t>
-            </a:r>
-            <a:r>
-              <a:rPr lang="zh-CN" altLang="zh-TW" sz="5400" b="1" dirty="0">
-                <a:solidFill>
-                  <a:srgbClr val="660033"/>
-                </a:solidFill>
-                <a:latin typeface="Microsoft JhengHei" panose="020B0604030504040204" pitchFamily="34" charset="-120"/>
-                <a:ea typeface="Microsoft JhengHei" panose="020B0604030504040204" pitchFamily="34" charset="-120"/>
-              </a:rPr>
-              <a:t>妙之釋放</a:t>
-            </a:r>
-          </a:p>
-          <a:p>
-            <a:pPr marL="0" indent="0" algn="ctr">
-              <a:buNone/>
-            </a:pPr>
-            <a:r>
-              <a:rPr lang="zh-CN" altLang="zh-TW" sz="5400" b="1" dirty="0">
-                <a:solidFill>
-                  <a:srgbClr val="660033"/>
-                </a:solidFill>
-                <a:latin typeface="Microsoft JhengHei" panose="020B0604030504040204" pitchFamily="34" charset="-120"/>
-                <a:ea typeface="Microsoft JhengHei" panose="020B0604030504040204" pitchFamily="34" charset="-120"/>
-              </a:rPr>
-              <a:t>我再無罪</a:t>
-            </a:r>
-            <a:r>
-              <a:rPr lang="zh-CN" altLang="zh-TW" sz="5400" b="1" dirty="0">
-                <a:solidFill>
-                  <a:srgbClr val="660033"/>
-                </a:solidFill>
-                <a:latin typeface="Microsoft JhengHei" panose="020B0604030504040204" pitchFamily="34" charset="-120"/>
-                <a:ea typeface="Microsoft JhengHei" panose="020B0604030504040204" pitchFamily="34" charset="-120"/>
-              </a:rPr>
-              <a:t>惡</a:t>
-            </a:r>
-            <a:r>
-              <a:rPr lang="en-US" altLang="zh-CN" sz="5400" b="1" dirty="0">
-                <a:solidFill>
-                  <a:srgbClr val="660033"/>
-                </a:solidFill>
-                <a:latin typeface="Microsoft JhengHei" panose="020B0604030504040204" pitchFamily="34" charset="-120"/>
-                <a:ea typeface="Microsoft JhengHei" panose="020B0604030504040204" pitchFamily="34" charset="-120"/>
-              </a:rPr>
-              <a:t>  </a:t>
-            </a:r>
-            <a:r>
-              <a:rPr lang="zh-CN" altLang="zh-TW" sz="5400" b="1" dirty="0">
-                <a:solidFill>
-                  <a:srgbClr val="660033"/>
-                </a:solidFill>
-                <a:latin typeface="Microsoft JhengHei" panose="020B0604030504040204" pitchFamily="34" charset="-120"/>
-                <a:ea typeface="Microsoft JhengHei" panose="020B0604030504040204" pitchFamily="34" charset="-120"/>
-              </a:rPr>
-              <a:t>束</a:t>
-            </a:r>
-            <a:r>
-              <a:rPr lang="zh-CN" altLang="zh-TW" sz="5400" b="1" dirty="0">
-                <a:solidFill>
-                  <a:srgbClr val="660033"/>
-                </a:solidFill>
-                <a:latin typeface="Microsoft JhengHei" panose="020B0604030504040204" pitchFamily="34" charset="-120"/>
-                <a:ea typeface="Microsoft JhengHei" panose="020B0604030504040204" pitchFamily="34" charset="-120"/>
-              </a:rPr>
-              <a:t>縛痛</a:t>
-            </a:r>
-            <a:r>
-              <a:rPr lang="zh-CN" altLang="zh-TW" sz="5400" b="1" dirty="0">
-                <a:solidFill>
-                  <a:srgbClr val="660033"/>
-                </a:solidFill>
-                <a:latin typeface="Microsoft JhengHei" panose="020B0604030504040204" pitchFamily="34" charset="-120"/>
-                <a:ea typeface="Microsoft JhengHei" panose="020B0604030504040204" pitchFamily="34" charset="-120"/>
-              </a:rPr>
-              <a:t>苦</a:t>
-            </a:r>
-            <a:endParaRPr lang="en-US" altLang="zh-CN" sz="5400" b="1" dirty="0">
+              <a:t>( 1 / 3 )</a:t>
+            </a:r>
+            <a:endParaRPr lang="vi-VN" sz="3200" b="1" dirty="0">
               <a:solidFill>
                 <a:srgbClr val="660033"/>
               </a:solidFill>
-              <a:latin typeface="Microsoft JhengHei" panose="020B0604030504040204" pitchFamily="34" charset="-120"/>
-              <a:ea typeface="Microsoft JhengHei" panose="020B0604030504040204" pitchFamily="34" charset="-120"/>
-            </a:endParaRPr>
-          </a:p>
-          <a:p>
-            <a:pPr marL="0" indent="0" algn="ctr">
-              <a:buNone/>
-            </a:pPr>
-            <a:r>
-              <a:rPr lang="zh-CN" altLang="zh-TW" sz="5400" b="1" dirty="0">
-                <a:solidFill>
-                  <a:srgbClr val="660033"/>
-                </a:solidFill>
-                <a:latin typeface="Microsoft JhengHei" panose="020B0604030504040204" pitchFamily="34" charset="-120"/>
-                <a:ea typeface="Microsoft JhengHei" panose="020B0604030504040204" pitchFamily="34" charset="-120"/>
-              </a:rPr>
-              <a:t>榮耀釋放</a:t>
-            </a:r>
-            <a:r>
-              <a:rPr lang="zh-CN" altLang="zh-TW" sz="5400" b="1" dirty="0">
-                <a:solidFill>
-                  <a:srgbClr val="660033"/>
-                </a:solidFill>
-                <a:latin typeface="Microsoft JhengHei" panose="020B0604030504040204" pitchFamily="34" charset="-120"/>
-                <a:ea typeface="Microsoft JhengHei" panose="020B0604030504040204" pitchFamily="34" charset="-120"/>
-              </a:rPr>
-              <a:t>者</a:t>
-            </a:r>
-            <a:r>
-              <a:rPr lang="en-US" altLang="zh-CN" sz="5400" b="1" dirty="0">
-                <a:solidFill>
-                  <a:srgbClr val="660033"/>
-                </a:solidFill>
-                <a:latin typeface="Microsoft JhengHei" panose="020B0604030504040204" pitchFamily="34" charset="-120"/>
-                <a:ea typeface="Microsoft JhengHei" panose="020B0604030504040204" pitchFamily="34" charset="-120"/>
-              </a:rPr>
-              <a:t>  </a:t>
-            </a:r>
-            <a:r>
-              <a:rPr lang="zh-CN" altLang="zh-TW" sz="5400" b="1" dirty="0">
-                <a:solidFill>
-                  <a:srgbClr val="660033"/>
-                </a:solidFill>
-                <a:latin typeface="Microsoft JhengHei" panose="020B0604030504040204" pitchFamily="34" charset="-120"/>
-                <a:ea typeface="Microsoft JhengHei" panose="020B0604030504040204" pitchFamily="34" charset="-120"/>
-              </a:rPr>
-              <a:t>是</a:t>
-            </a:r>
-            <a:r>
-              <a:rPr lang="zh-CN" altLang="zh-TW" sz="5400" b="1" dirty="0">
-                <a:solidFill>
-                  <a:srgbClr val="660033"/>
-                </a:solidFill>
-                <a:latin typeface="Microsoft JhengHei" panose="020B0604030504040204" pitchFamily="34" charset="-120"/>
-                <a:ea typeface="Microsoft JhengHei" panose="020B0604030504040204" pitchFamily="34" charset="-120"/>
-              </a:rPr>
-              <a:t>救主耶穌</a:t>
-            </a:r>
-          </a:p>
-          <a:p>
-            <a:pPr marL="0" indent="0" algn="ctr">
-              <a:buNone/>
-            </a:pPr>
-            <a:r>
-              <a:rPr lang="zh-CN" altLang="zh-TW" sz="5400" b="1" dirty="0">
-                <a:solidFill>
-                  <a:srgbClr val="660033"/>
-                </a:solidFill>
-                <a:latin typeface="Microsoft JhengHei" panose="020B0604030504040204" pitchFamily="34" charset="-120"/>
-                <a:ea typeface="Microsoft JhengHei" panose="020B0604030504040204" pitchFamily="34" charset="-120"/>
-              </a:rPr>
-              <a:t>從今到永</a:t>
-            </a:r>
-            <a:r>
-              <a:rPr lang="zh-CN" altLang="zh-TW" sz="5400" b="1" dirty="0">
-                <a:solidFill>
-                  <a:srgbClr val="660033"/>
-                </a:solidFill>
-                <a:latin typeface="Microsoft JhengHei" panose="020B0604030504040204" pitchFamily="34" charset="-120"/>
-                <a:ea typeface="Microsoft JhengHei" panose="020B0604030504040204" pitchFamily="34" charset="-120"/>
-              </a:rPr>
-              <a:t>遠</a:t>
-            </a:r>
-            <a:r>
-              <a:rPr lang="en-US" altLang="zh-CN" sz="5400" b="1" dirty="0">
-                <a:solidFill>
-                  <a:srgbClr val="660033"/>
-                </a:solidFill>
-                <a:latin typeface="Microsoft JhengHei" panose="020B0604030504040204" pitchFamily="34" charset="-120"/>
-                <a:ea typeface="Microsoft JhengHei" panose="020B0604030504040204" pitchFamily="34" charset="-120"/>
-              </a:rPr>
-              <a:t>  </a:t>
-            </a:r>
-            <a:r>
-              <a:rPr lang="zh-CN" altLang="zh-TW" sz="5400" b="1" dirty="0">
-                <a:solidFill>
-                  <a:srgbClr val="660033"/>
-                </a:solidFill>
-                <a:latin typeface="Microsoft JhengHei" panose="020B0604030504040204" pitchFamily="34" charset="-120"/>
-                <a:ea typeface="Microsoft JhengHei" panose="020B0604030504040204" pitchFamily="34" charset="-120"/>
-              </a:rPr>
-              <a:t>使</a:t>
-            </a:r>
-            <a:r>
-              <a:rPr lang="zh-CN" altLang="zh-TW" sz="5400" b="1" dirty="0">
-                <a:solidFill>
-                  <a:srgbClr val="660033"/>
-                </a:solidFill>
-                <a:latin typeface="Microsoft JhengHei" panose="020B0604030504040204" pitchFamily="34" charset="-120"/>
-                <a:ea typeface="Microsoft JhengHei" panose="020B0604030504040204" pitchFamily="34" charset="-120"/>
-              </a:rPr>
-              <a:t>我釋</a:t>
-            </a:r>
-            <a:r>
-              <a:rPr lang="zh-CN" altLang="zh-TW" sz="5400" b="1" dirty="0">
-                <a:solidFill>
-                  <a:srgbClr val="660033"/>
-                </a:solidFill>
-                <a:latin typeface="Microsoft JhengHei" panose="020B0604030504040204" pitchFamily="34" charset="-120"/>
-                <a:ea typeface="Microsoft JhengHei" panose="020B0604030504040204" pitchFamily="34" charset="-120"/>
-              </a:rPr>
-              <a:t>放</a:t>
-            </a:r>
-            <a:endParaRPr lang="zh-CN" altLang="zh-TW" sz="5400" b="1" dirty="0">
-              <a:solidFill>
-                <a:srgbClr val="660033"/>
-              </a:solidFill>
-              <a:latin typeface="Microsoft JhengHei" panose="020B0604030504040204" pitchFamily="34" charset="-120"/>
-              <a:ea typeface="Microsoft JhengHei" panose="020B0604030504040204" pitchFamily="34" charset="-120"/>
             </a:endParaRPr>
           </a:p>
         </p:txBody>
@@ -4271,7 +4527,7 @@
     </p:spTree>
     <p:extLst>
       <p:ext uri="{BB962C8B-B14F-4D97-AF65-F5344CB8AC3E}">
-        <p14:creationId xmlns:p14="http://schemas.microsoft.com/office/powerpoint/2010/main" val="4066523"/>
+        <p14:creationId xmlns:p14="http://schemas.microsoft.com/office/powerpoint/2010/main" val="1407003638"/>
       </p:ext>
     </p:extLst>
   </p:cSld>
@@ -4286,7 +4542,13 @@
   <p:cSld>
     <p:spTree>
       <p:nvGrpSpPr>
-        <p:cNvPr id="1" name=""/>
+        <p:cNvPr id="1" name="">
+          <a:extLst>
+            <a:ext uri="{FF2B5EF4-FFF2-40B4-BE49-F238E27FC236}">
+              <a16:creationId xmlns:a16="http://schemas.microsoft.com/office/drawing/2014/main" id="{7607FF40-3814-AC2D-71B8-5FF74AEC95ED}"/>
+            </a:ext>
+          </a:extLst>
+        </p:cNvPr>
         <p:cNvGrpSpPr/>
         <p:nvPr/>
       </p:nvGrpSpPr>
@@ -4300,206 +4562,101 @@
       </p:grpSpPr>
       <p:sp>
         <p:nvSpPr>
-          <p:cNvPr id="4" name="Title 3"/>
-          <p:cNvSpPr>
-            <a:spLocks noGrp="1"/>
-          </p:cNvSpPr>
-          <p:nvPr>
-            <p:ph type="title"/>
-          </p:nvPr>
-        </p:nvSpPr>
-        <p:spPr/>
-        <p:txBody>
-          <a:bodyPr>
+          <p:cNvPr id="5" name="內容版面配置區 4">
+            <a:extLst>
+              <a:ext uri="{FF2B5EF4-FFF2-40B4-BE49-F238E27FC236}">
+                <a16:creationId xmlns:a16="http://schemas.microsoft.com/office/drawing/2014/main" id="{48DE0CC4-2AFF-BFDE-FF4C-A21649DCB2AC}"/>
+              </a:ext>
+            </a:extLst>
+          </p:cNvPr>
+          <p:cNvSpPr>
+            <a:spLocks noGrp="1"/>
+          </p:cNvSpPr>
+          <p:nvPr>
+            <p:ph idx="1"/>
+          </p:nvPr>
+        </p:nvSpPr>
+        <p:spPr>
+          <a:xfrm>
+            <a:off x="0" y="2084851"/>
+            <a:ext cx="12192000" cy="2404863"/>
+          </a:xfrm>
+        </p:spPr>
+        <p:txBody>
+          <a:bodyPr anchor="ctr">
             <a:normAutofit/>
           </a:bodyPr>
           <a:lstStyle/>
           <a:p>
-            <a:r>
-              <a:rPr lang="en-US" altLang="zh-CN" sz="4800" b="1" dirty="0">
+            <a:pPr marL="0" indent="0" algn="ctr">
+              <a:buNone/>
+            </a:pPr>
+            <a:r>
+              <a:rPr lang="zh-CN" altLang="en-US" sz="6400" b="1" dirty="0">
                 <a:solidFill>
                   <a:srgbClr val="660033"/>
                 </a:solidFill>
                 <a:latin typeface="Microsoft JhengHei" panose="020B0604030504040204" pitchFamily="34" charset="-120"/>
                 <a:ea typeface="Microsoft JhengHei" panose="020B0604030504040204" pitchFamily="34" charset="-120"/>
               </a:rPr>
-              <a:t>【</a:t>
-            </a:r>
-            <a:r>
-              <a:rPr lang="zh-CN" altLang="en-US" sz="4800" b="1" dirty="0">
+              <a:t>但耶穌斷開我一切鎖鏈</a:t>
+            </a:r>
+          </a:p>
+          <a:p>
+            <a:pPr marL="0" indent="0" algn="ctr">
+              <a:buNone/>
+            </a:pPr>
+            <a:r>
+              <a:rPr lang="zh-CN" altLang="en-US" sz="6400" b="1" dirty="0">
                 <a:solidFill>
                   <a:srgbClr val="660033"/>
                 </a:solidFill>
                 <a:latin typeface="Microsoft JhengHei" panose="020B0604030504040204" pitchFamily="34" charset="-120"/>
                 <a:ea typeface="Microsoft JhengHei" panose="020B0604030504040204" pitchFamily="34" charset="-120"/>
               </a:rPr>
-              <a:t>榮耀釋放</a:t>
-            </a:r>
-            <a:r>
-              <a:rPr lang="en-US" altLang="zh-CN" sz="4800" b="1" dirty="0">
-                <a:solidFill>
-                  <a:srgbClr val="660033"/>
-                </a:solidFill>
-                <a:latin typeface="Microsoft JhengHei" panose="020B0604030504040204" pitchFamily="34" charset="-120"/>
-                <a:ea typeface="Microsoft JhengHei" panose="020B0604030504040204" pitchFamily="34" charset="-120"/>
-              </a:rPr>
-              <a:t>】</a:t>
-            </a:r>
-          </a:p>
-        </p:txBody>
-      </p:sp>
-      <p:sp>
-        <p:nvSpPr>
-          <p:cNvPr id="5" name="Content Placeholder 4"/>
-          <p:cNvSpPr>
-            <a:spLocks noGrp="1"/>
-          </p:cNvSpPr>
-          <p:nvPr>
-            <p:ph idx="1"/>
-          </p:nvPr>
-        </p:nvSpPr>
-        <p:spPr/>
-        <p:txBody>
-          <a:bodyPr>
-            <a:noAutofit/>
-          </a:bodyPr>
-          <a:lstStyle/>
-          <a:p>
-            <a:pPr marL="0" indent="0" algn="ctr">
-              <a:buNone/>
-            </a:pPr>
-            <a:r>
-              <a:rPr lang="zh-CN" altLang="zh-TW" sz="5400" b="1" dirty="0">
-                <a:solidFill>
-                  <a:srgbClr val="660033"/>
-                </a:solidFill>
-                <a:latin typeface="Microsoft JhengHei" panose="020B0604030504040204" pitchFamily="34" charset="-120"/>
-                <a:ea typeface="Microsoft JhengHei" panose="020B0604030504040204" pitchFamily="34" charset="-120"/>
-              </a:rPr>
-              <a:t>主使我脫離情慾和嗜好</a:t>
-            </a:r>
-          </a:p>
-          <a:p>
-            <a:pPr marL="0" indent="0" algn="ctr">
-              <a:buNone/>
-            </a:pPr>
-            <a:r>
-              <a:rPr lang="zh-CN" altLang="zh-TW" sz="5400" b="1" dirty="0">
-                <a:solidFill>
-                  <a:srgbClr val="660033"/>
-                </a:solidFill>
-                <a:latin typeface="Microsoft JhengHei" panose="020B0604030504040204" pitchFamily="34" charset="-120"/>
-                <a:ea typeface="Microsoft JhengHei" panose="020B0604030504040204" pitchFamily="34" charset="-120"/>
-              </a:rPr>
-              <a:t>脫離我妒忌恨惡狂傲</a:t>
-            </a:r>
-          </a:p>
-          <a:p>
-            <a:pPr marL="0" indent="0" algn="ctr">
-              <a:buNone/>
-            </a:pPr>
-            <a:r>
-              <a:rPr lang="zh-CN" altLang="zh-TW" sz="5400" b="1" dirty="0">
-                <a:solidFill>
-                  <a:srgbClr val="660033"/>
-                </a:solidFill>
-                <a:latin typeface="Microsoft JhengHei" panose="020B0604030504040204" pitchFamily="34" charset="-120"/>
-                <a:ea typeface="Microsoft JhengHei" panose="020B0604030504040204" pitchFamily="34" charset="-120"/>
-              </a:rPr>
-              <a:t>脫離我世俗虛空</a:t>
-            </a:r>
-            <a:r>
-              <a:rPr lang="zh-CN" altLang="zh-TW" sz="5400" b="1" dirty="0">
-                <a:solidFill>
-                  <a:srgbClr val="660033"/>
-                </a:solidFill>
-                <a:latin typeface="Microsoft JhengHei" panose="020B0604030504040204" pitchFamily="34" charset="-120"/>
-                <a:ea typeface="Microsoft JhengHei" panose="020B0604030504040204" pitchFamily="34" charset="-120"/>
-              </a:rPr>
-              <a:t>之</a:t>
-            </a:r>
-            <a:r>
-              <a:rPr lang="en-US" altLang="zh-CN" sz="5400" b="1" dirty="0">
-                <a:solidFill>
-                  <a:srgbClr val="660033"/>
-                </a:solidFill>
-                <a:latin typeface="Microsoft JhengHei" panose="020B0604030504040204" pitchFamily="34" charset="-120"/>
-                <a:ea typeface="Microsoft JhengHei" panose="020B0604030504040204" pitchFamily="34" charset="-120"/>
-              </a:rPr>
-              <a:t>幻</a:t>
-            </a:r>
-            <a:r>
-              <a:rPr lang="zh-CN" altLang="en-US" sz="5400" b="1" dirty="0">
-                <a:solidFill>
-                  <a:srgbClr val="660033"/>
-                </a:solidFill>
-                <a:latin typeface="Microsoft JhengHei" panose="020B0604030504040204" pitchFamily="34" charset="-120"/>
-                <a:ea typeface="Microsoft JhengHei" panose="020B0604030504040204" pitchFamily="34" charset="-120"/>
-              </a:rPr>
-              <a:t>想</a:t>
-            </a:r>
-          </a:p>
-          <a:p>
-            <a:pPr marL="0" indent="0" algn="ctr">
-              <a:buNone/>
-            </a:pPr>
-            <a:r>
-              <a:rPr lang="zh-CN" altLang="en-US" sz="5400" b="1" dirty="0">
-                <a:solidFill>
-                  <a:srgbClr val="660033"/>
-                </a:solidFill>
-                <a:latin typeface="Microsoft JhengHei" panose="020B0604030504040204" pitchFamily="34" charset="-120"/>
-                <a:ea typeface="Microsoft JhengHei" panose="020B0604030504040204" pitchFamily="34" charset="-120"/>
-              </a:rPr>
-              <a:t>亦使我離去一切憂勞</a:t>
-            </a:r>
-          </a:p>
-        </p:txBody>
-      </p:sp>
-      <p:sp>
-        <p:nvSpPr>
-          <p:cNvPr id="6" name="Text Box 1"/>
+              <a:t>榮耀之救恩使我釋放</a:t>
+            </a:r>
+          </a:p>
+        </p:txBody>
+      </p:sp>
+      <p:sp>
+        <p:nvSpPr>
+          <p:cNvPr id="3" name="TextBox 2">
+            <a:extLst>
+              <a:ext uri="{FF2B5EF4-FFF2-40B4-BE49-F238E27FC236}">
+                <a16:creationId xmlns:a16="http://schemas.microsoft.com/office/drawing/2014/main" id="{0A864CF1-284B-B2CA-BB8F-4121E49B008C}"/>
+              </a:ext>
+            </a:extLst>
+          </p:cNvPr>
           <p:cNvSpPr txBox="1"/>
           <p:nvPr/>
         </p:nvSpPr>
         <p:spPr>
           <a:xfrm>
-            <a:off x="767408" y="1700808"/>
-            <a:ext cx="1055440" cy="923330"/>
+            <a:off x="0" y="5061182"/>
+            <a:ext cx="12192000" cy="584775"/>
           </a:xfrm>
           <a:prstGeom prst="rect">
             <a:avLst/>
           </a:prstGeom>
           <a:noFill/>
-          <a:ln w="9525">
-            <a:noFill/>
-            <a:miter lim="800000"/>
-          </a:ln>
         </p:spPr>
         <p:txBody>
-          <a:bodyPr wrap="square">
+          <a:bodyPr wrap="square" rtlCol="0">
             <a:spAutoFit/>
           </a:bodyPr>
           <a:lstStyle/>
           <a:p>
             <a:pPr algn="ctr"/>
             <a:r>
-              <a:rPr lang="en-US" sz="5400" b="1" dirty="0">
+              <a:rPr lang="en-US" sz="3200" b="1" dirty="0">
                 <a:solidFill>
                   <a:srgbClr val="660033"/>
                 </a:solidFill>
               </a:rPr>
-              <a:t>2</a:t>
-            </a:r>
-            <a:r>
-              <a:rPr lang="en-US" sz="5400" b="1" dirty="0" smtClean="0">
-                <a:solidFill>
-                  <a:srgbClr val="660033"/>
-                </a:solidFill>
-              </a:rPr>
-              <a:t>.</a:t>
-            </a:r>
-            <a:endParaRPr lang="en-US" sz="5400" b="1" dirty="0">
+              <a:t>( 1 / 3 )</a:t>
+            </a:r>
+            <a:endParaRPr lang="vi-VN" sz="3200" b="1" dirty="0">
               <a:solidFill>
                 <a:srgbClr val="660033"/>
               </a:solidFill>
@@ -4510,7 +4667,7 @@
     </p:spTree>
     <p:extLst>
       <p:ext uri="{BB962C8B-B14F-4D97-AF65-F5344CB8AC3E}">
-        <p14:creationId xmlns:p14="http://schemas.microsoft.com/office/powerpoint/2010/main" val="473910255"/>
+        <p14:creationId xmlns:p14="http://schemas.microsoft.com/office/powerpoint/2010/main" val="1093477291"/>
       </p:ext>
     </p:extLst>
   </p:cSld>
@@ -4525,7 +4682,13 @@
   <p:cSld>
     <p:spTree>
       <p:nvGrpSpPr>
-        <p:cNvPr id="1" name=""/>
+        <p:cNvPr id="1" name="">
+          <a:extLst>
+            <a:ext uri="{FF2B5EF4-FFF2-40B4-BE49-F238E27FC236}">
+              <a16:creationId xmlns:a16="http://schemas.microsoft.com/office/drawing/2014/main" id="{B1E82ED2-EB58-1700-5992-97FE3D443399}"/>
+            </a:ext>
+          </a:extLst>
+        </p:cNvPr>
         <p:cNvGrpSpPr/>
         <p:nvPr/>
       </p:nvGrpSpPr>
@@ -4539,96 +4702,47 @@
       </p:grpSpPr>
       <p:sp>
         <p:nvSpPr>
-          <p:cNvPr id="4" name="Title 3"/>
-          <p:cNvSpPr>
-            <a:spLocks noGrp="1"/>
-          </p:cNvSpPr>
-          <p:nvPr>
-            <p:ph type="title"/>
-          </p:nvPr>
-        </p:nvSpPr>
-        <p:spPr/>
-        <p:txBody>
-          <a:bodyPr>
+          <p:cNvPr id="5" name="內容版面配置區 4">
+            <a:extLst>
+              <a:ext uri="{FF2B5EF4-FFF2-40B4-BE49-F238E27FC236}">
+                <a16:creationId xmlns:a16="http://schemas.microsoft.com/office/drawing/2014/main" id="{282A0771-12D3-03CD-2940-757EB836B610}"/>
+              </a:ext>
+            </a:extLst>
+          </p:cNvPr>
+          <p:cNvSpPr>
+            <a:spLocks noGrp="1"/>
+          </p:cNvSpPr>
+          <p:nvPr>
+            <p:ph idx="1"/>
+          </p:nvPr>
+        </p:nvSpPr>
+        <p:spPr>
+          <a:xfrm>
+            <a:off x="0" y="2084851"/>
+            <a:ext cx="12192000" cy="2404863"/>
+          </a:xfrm>
+        </p:spPr>
+        <p:txBody>
+          <a:bodyPr anchor="ctr">
             <a:normAutofit/>
           </a:bodyPr>
           <a:lstStyle/>
           <a:p>
-            <a:r>
-              <a:rPr lang="en-US" altLang="zh-CN" sz="4800" b="1" dirty="0">
+            <a:pPr marL="0" indent="0" algn="ctr">
+              <a:buNone/>
+            </a:pPr>
+            <a:r>
+              <a:rPr lang="zh-CN" altLang="zh-TW" sz="6400" b="1" dirty="0">
                 <a:solidFill>
                   <a:srgbClr val="660033"/>
                 </a:solidFill>
                 <a:latin typeface="Microsoft JhengHei" panose="020B0604030504040204" pitchFamily="34" charset="-120"/>
                 <a:ea typeface="Microsoft JhengHei" panose="020B0604030504040204" pitchFamily="34" charset="-120"/>
               </a:rPr>
-              <a:t>【</a:t>
-            </a:r>
-            <a:r>
-              <a:rPr lang="zh-CN" altLang="en-US" sz="4800" b="1" dirty="0">
-                <a:solidFill>
-                  <a:srgbClr val="660033"/>
-                </a:solidFill>
-                <a:latin typeface="Microsoft JhengHei" panose="020B0604030504040204" pitchFamily="34" charset="-120"/>
-                <a:ea typeface="Microsoft JhengHei" panose="020B0604030504040204" pitchFamily="34" charset="-120"/>
-              </a:rPr>
-              <a:t>榮耀釋放</a:t>
-            </a:r>
-            <a:r>
-              <a:rPr lang="en-US" altLang="zh-CN" sz="4800" b="1" dirty="0">
-                <a:solidFill>
-                  <a:srgbClr val="660033"/>
-                </a:solidFill>
-                <a:latin typeface="Microsoft JhengHei" panose="020B0604030504040204" pitchFamily="34" charset="-120"/>
-                <a:ea typeface="Microsoft JhengHei" panose="020B0604030504040204" pitchFamily="34" charset="-120"/>
-              </a:rPr>
-              <a:t>】</a:t>
-            </a:r>
-          </a:p>
-        </p:txBody>
-      </p:sp>
-      <p:sp>
-        <p:nvSpPr>
-          <p:cNvPr id="5" name="Content Placeholder 4"/>
-          <p:cNvSpPr>
-            <a:spLocks noGrp="1"/>
-          </p:cNvSpPr>
-          <p:nvPr>
-            <p:ph idx="1"/>
-          </p:nvPr>
-        </p:nvSpPr>
-        <p:spPr/>
-        <p:txBody>
-          <a:bodyPr>
-            <a:noAutofit/>
-          </a:bodyPr>
-          <a:lstStyle/>
-          <a:p>
-            <a:pPr marL="0" indent="0" algn="ctr">
-              <a:buNone/>
-            </a:pPr>
-            <a:r>
-              <a:rPr lang="zh-CN" altLang="zh-TW" sz="5400" b="1" dirty="0">
-                <a:solidFill>
-                  <a:srgbClr val="660033"/>
-                </a:solidFill>
-                <a:latin typeface="Microsoft JhengHei" panose="020B0604030504040204" pitchFamily="34" charset="-120"/>
-                <a:ea typeface="Microsoft JhengHei" panose="020B0604030504040204" pitchFamily="34" charset="-120"/>
-              </a:rPr>
-              <a:t>榮耀之釋</a:t>
-            </a:r>
-            <a:r>
-              <a:rPr lang="zh-CN" altLang="zh-TW" sz="5400" b="1" dirty="0">
-                <a:solidFill>
-                  <a:srgbClr val="660033"/>
-                </a:solidFill>
-                <a:latin typeface="Microsoft JhengHei" panose="020B0604030504040204" pitchFamily="34" charset="-120"/>
-                <a:ea typeface="Microsoft JhengHei" panose="020B0604030504040204" pitchFamily="34" charset="-120"/>
-              </a:rPr>
-              <a:t>放</a:t>
-            </a:r>
-            <a:r>
-              <a:rPr lang="en-US" altLang="zh-CN" sz="5400" b="1" dirty="0">
+              <a:t>榮耀之釋放</a:t>
+            </a:r>
+            <a:r>
+              <a:rPr lang="en-US" altLang="zh-CN" sz="6400" b="1" dirty="0">
                 <a:solidFill>
                   <a:srgbClr val="660033"/>
                 </a:solidFill>
@@ -4638,52 +4752,32 @@
               <a:t>  </a:t>
             </a:r>
             <a:r>
-              <a:rPr lang="zh-CN" altLang="zh-TW" sz="5400" b="1" dirty="0">
+              <a:rPr lang="zh-CN" altLang="zh-TW" sz="6400" b="1" dirty="0">
                 <a:solidFill>
                   <a:srgbClr val="660033"/>
                 </a:solidFill>
                 <a:latin typeface="Microsoft JhengHei" panose="020B0604030504040204" pitchFamily="34" charset="-120"/>
                 <a:ea typeface="Microsoft JhengHei" panose="020B0604030504040204" pitchFamily="34" charset="-120"/>
               </a:rPr>
-              <a:t>奇</a:t>
-            </a:r>
-            <a:r>
-              <a:rPr lang="zh-CN" altLang="zh-TW" sz="5400" b="1" dirty="0">
+              <a:t>奇妙之釋放</a:t>
+            </a:r>
+          </a:p>
+          <a:p>
+            <a:pPr marL="0" indent="0" algn="ctr">
+              <a:buNone/>
+            </a:pPr>
+            <a:r>
+              <a:rPr lang="zh-CN" altLang="zh-TW" sz="6400" b="1" dirty="0">
                 <a:solidFill>
                   <a:srgbClr val="660033"/>
                 </a:solidFill>
                 <a:latin typeface="Microsoft JhengHei" panose="020B0604030504040204" pitchFamily="34" charset="-120"/>
                 <a:ea typeface="Microsoft JhengHei" panose="020B0604030504040204" pitchFamily="34" charset="-120"/>
               </a:rPr>
-              <a:t>妙之釋放</a:t>
-            </a:r>
-          </a:p>
-          <a:p>
-            <a:pPr marL="0" indent="0" algn="ctr">
-              <a:buNone/>
-            </a:pPr>
-            <a:r>
-              <a:rPr lang="zh-CN" altLang="zh-TW" sz="5400" b="1" dirty="0">
-                <a:solidFill>
-                  <a:srgbClr val="660033"/>
-                </a:solidFill>
-                <a:latin typeface="Microsoft JhengHei" panose="020B0604030504040204" pitchFamily="34" charset="-120"/>
-                <a:ea typeface="Microsoft JhengHei" panose="020B0604030504040204" pitchFamily="34" charset="-120"/>
-              </a:rPr>
-              <a:t>我再無罪</a:t>
-            </a:r>
-            <a:r>
-              <a:rPr lang="zh-CN" altLang="zh-TW" sz="5400" b="1" dirty="0">
-                <a:solidFill>
-                  <a:srgbClr val="660033"/>
-                </a:solidFill>
-                <a:latin typeface="Microsoft JhengHei" panose="020B0604030504040204" pitchFamily="34" charset="-120"/>
-                <a:ea typeface="Microsoft JhengHei" panose="020B0604030504040204" pitchFamily="34" charset="-120"/>
-              </a:rPr>
-              <a:t>惡</a:t>
-            </a:r>
-            <a:r>
-              <a:rPr lang="en-US" altLang="zh-CN" sz="5400" b="1" dirty="0">
+              <a:t>我再無罪惡</a:t>
+            </a:r>
+            <a:r>
+              <a:rPr lang="en-US" altLang="zh-CN" sz="6400" b="1" dirty="0">
                 <a:solidFill>
                   <a:srgbClr val="660033"/>
                 </a:solidFill>
@@ -4693,36 +4787,16 @@
               <a:t>  </a:t>
             </a:r>
             <a:r>
-              <a:rPr lang="zh-CN" altLang="zh-TW" sz="5400" b="1" dirty="0">
+              <a:rPr lang="zh-CN" altLang="zh-TW" sz="6400" b="1" dirty="0">
                 <a:solidFill>
                   <a:srgbClr val="660033"/>
                 </a:solidFill>
                 <a:latin typeface="Microsoft JhengHei" panose="020B0604030504040204" pitchFamily="34" charset="-120"/>
                 <a:ea typeface="Microsoft JhengHei" panose="020B0604030504040204" pitchFamily="34" charset="-120"/>
               </a:rPr>
-              <a:t>束</a:t>
-            </a:r>
-            <a:r>
-              <a:rPr lang="zh-CN" altLang="zh-TW" sz="5400" b="1" dirty="0">
-                <a:solidFill>
-                  <a:srgbClr val="660033"/>
-                </a:solidFill>
-                <a:latin typeface="Microsoft JhengHei" panose="020B0604030504040204" pitchFamily="34" charset="-120"/>
-                <a:ea typeface="Microsoft JhengHei" panose="020B0604030504040204" pitchFamily="34" charset="-120"/>
-              </a:rPr>
-              <a:t>縛痛</a:t>
-            </a:r>
-            <a:r>
-              <a:rPr lang="zh-CN" altLang="zh-TW" sz="5400" b="1" dirty="0">
-                <a:solidFill>
-                  <a:srgbClr val="660033"/>
-                </a:solidFill>
-                <a:latin typeface="Microsoft JhengHei" panose="020B0604030504040204" pitchFamily="34" charset="-120"/>
-                <a:ea typeface="Microsoft JhengHei" panose="020B0604030504040204" pitchFamily="34" charset="-120"/>
-              </a:rPr>
-              <a:t>苦</a:t>
-            </a:r>
-            <a:endParaRPr lang="en-US" altLang="zh-CN" sz="5400" b="1" dirty="0">
+              <a:t>束縛痛苦</a:t>
+            </a:r>
+            <a:endParaRPr lang="en-US" altLang="zh-CN" sz="6400" b="1" dirty="0">
               <a:solidFill>
                 <a:srgbClr val="660033"/>
               </a:solidFill>
@@ -4730,139 +4804,12 @@
               <a:ea typeface="Microsoft JhengHei" panose="020B0604030504040204" pitchFamily="34" charset="-120"/>
             </a:endParaRPr>
           </a:p>
-          <a:p>
-            <a:pPr marL="0" indent="0" algn="ctr">
-              <a:buNone/>
-            </a:pPr>
-            <a:r>
-              <a:rPr lang="zh-CN" altLang="zh-TW" sz="5400" b="1" dirty="0">
-                <a:solidFill>
-                  <a:srgbClr val="660033"/>
-                </a:solidFill>
-                <a:latin typeface="Microsoft JhengHei" panose="020B0604030504040204" pitchFamily="34" charset="-120"/>
-                <a:ea typeface="Microsoft JhengHei" panose="020B0604030504040204" pitchFamily="34" charset="-120"/>
-              </a:rPr>
-              <a:t>榮耀釋放</a:t>
-            </a:r>
-            <a:r>
-              <a:rPr lang="zh-CN" altLang="zh-TW" sz="5400" b="1" dirty="0">
-                <a:solidFill>
-                  <a:srgbClr val="660033"/>
-                </a:solidFill>
-                <a:latin typeface="Microsoft JhengHei" panose="020B0604030504040204" pitchFamily="34" charset="-120"/>
-                <a:ea typeface="Microsoft JhengHei" panose="020B0604030504040204" pitchFamily="34" charset="-120"/>
-              </a:rPr>
-              <a:t>者</a:t>
-            </a:r>
-            <a:r>
-              <a:rPr lang="en-US" altLang="zh-CN" sz="5400" b="1" dirty="0">
-                <a:solidFill>
-                  <a:srgbClr val="660033"/>
-                </a:solidFill>
-                <a:latin typeface="Microsoft JhengHei" panose="020B0604030504040204" pitchFamily="34" charset="-120"/>
-                <a:ea typeface="Microsoft JhengHei" panose="020B0604030504040204" pitchFamily="34" charset="-120"/>
-              </a:rPr>
-              <a:t>  </a:t>
-            </a:r>
-            <a:r>
-              <a:rPr lang="zh-CN" altLang="zh-TW" sz="5400" b="1" dirty="0">
-                <a:solidFill>
-                  <a:srgbClr val="660033"/>
-                </a:solidFill>
-                <a:latin typeface="Microsoft JhengHei" panose="020B0604030504040204" pitchFamily="34" charset="-120"/>
-                <a:ea typeface="Microsoft JhengHei" panose="020B0604030504040204" pitchFamily="34" charset="-120"/>
-              </a:rPr>
-              <a:t>是</a:t>
-            </a:r>
-            <a:r>
-              <a:rPr lang="zh-CN" altLang="zh-TW" sz="5400" b="1" dirty="0">
-                <a:solidFill>
-                  <a:srgbClr val="660033"/>
-                </a:solidFill>
-                <a:latin typeface="Microsoft JhengHei" panose="020B0604030504040204" pitchFamily="34" charset="-120"/>
-                <a:ea typeface="Microsoft JhengHei" panose="020B0604030504040204" pitchFamily="34" charset="-120"/>
-              </a:rPr>
-              <a:t>救主耶穌</a:t>
-            </a:r>
-          </a:p>
-          <a:p>
-            <a:pPr marL="0" indent="0" algn="ctr">
-              <a:buNone/>
-            </a:pPr>
-            <a:r>
-              <a:rPr lang="zh-CN" altLang="zh-TW" sz="5400" b="1" dirty="0">
-                <a:solidFill>
-                  <a:srgbClr val="660033"/>
-                </a:solidFill>
-                <a:latin typeface="Microsoft JhengHei" panose="020B0604030504040204" pitchFamily="34" charset="-120"/>
-                <a:ea typeface="Microsoft JhengHei" panose="020B0604030504040204" pitchFamily="34" charset="-120"/>
-              </a:rPr>
-              <a:t>從今到永</a:t>
-            </a:r>
-            <a:r>
-              <a:rPr lang="zh-CN" altLang="zh-TW" sz="5400" b="1" dirty="0">
-                <a:solidFill>
-                  <a:srgbClr val="660033"/>
-                </a:solidFill>
-                <a:latin typeface="Microsoft JhengHei" panose="020B0604030504040204" pitchFamily="34" charset="-120"/>
-                <a:ea typeface="Microsoft JhengHei" panose="020B0604030504040204" pitchFamily="34" charset="-120"/>
-              </a:rPr>
-              <a:t>遠</a:t>
-            </a:r>
-            <a:r>
-              <a:rPr lang="en-US" altLang="zh-CN" sz="5400" b="1" dirty="0">
-                <a:solidFill>
-                  <a:srgbClr val="660033"/>
-                </a:solidFill>
-                <a:latin typeface="Microsoft JhengHei" panose="020B0604030504040204" pitchFamily="34" charset="-120"/>
-                <a:ea typeface="Microsoft JhengHei" panose="020B0604030504040204" pitchFamily="34" charset="-120"/>
-              </a:rPr>
-              <a:t>  </a:t>
-            </a:r>
-            <a:r>
-              <a:rPr lang="zh-CN" altLang="zh-TW" sz="5400" b="1" dirty="0">
-                <a:solidFill>
-                  <a:srgbClr val="660033"/>
-                </a:solidFill>
-                <a:latin typeface="Microsoft JhengHei" panose="020B0604030504040204" pitchFamily="34" charset="-120"/>
-                <a:ea typeface="Microsoft JhengHei" panose="020B0604030504040204" pitchFamily="34" charset="-120"/>
-              </a:rPr>
-              <a:t>使</a:t>
-            </a:r>
-            <a:r>
-              <a:rPr lang="zh-CN" altLang="zh-TW" sz="5400" b="1" dirty="0">
-                <a:solidFill>
-                  <a:srgbClr val="660033"/>
-                </a:solidFill>
-                <a:latin typeface="Microsoft JhengHei" panose="020B0604030504040204" pitchFamily="34" charset="-120"/>
-                <a:ea typeface="Microsoft JhengHei" panose="020B0604030504040204" pitchFamily="34" charset="-120"/>
-              </a:rPr>
-              <a:t>我釋</a:t>
-            </a:r>
-            <a:r>
-              <a:rPr lang="zh-CN" altLang="zh-TW" sz="5400" b="1" dirty="0">
-                <a:solidFill>
-                  <a:srgbClr val="660033"/>
-                </a:solidFill>
-                <a:latin typeface="Microsoft JhengHei" panose="020B0604030504040204" pitchFamily="34" charset="-120"/>
-                <a:ea typeface="Microsoft JhengHei" panose="020B0604030504040204" pitchFamily="34" charset="-120"/>
-              </a:rPr>
-              <a:t>放</a:t>
-            </a:r>
-            <a:endParaRPr lang="zh-CN" altLang="zh-TW" sz="5400" b="1" dirty="0">
-              <a:solidFill>
-                <a:srgbClr val="660033"/>
-              </a:solidFill>
-              <a:latin typeface="Microsoft JhengHei" panose="020B0604030504040204" pitchFamily="34" charset="-120"/>
-              <a:ea typeface="Microsoft JhengHei" panose="020B0604030504040204" pitchFamily="34" charset="-120"/>
-            </a:endParaRPr>
-          </a:p>
         </p:txBody>
       </p:sp>
     </p:spTree>
     <p:extLst>
       <p:ext uri="{BB962C8B-B14F-4D97-AF65-F5344CB8AC3E}">
-        <p14:creationId xmlns:p14="http://schemas.microsoft.com/office/powerpoint/2010/main" val="944059718"/>
+        <p14:creationId xmlns:p14="http://schemas.microsoft.com/office/powerpoint/2010/main" val="2252023975"/>
       </p:ext>
     </p:extLst>
   </p:cSld>
@@ -4877,7 +4824,13 @@
   <p:cSld>
     <p:spTree>
       <p:nvGrpSpPr>
-        <p:cNvPr id="1" name=""/>
+        <p:cNvPr id="1" name="">
+          <a:extLst>
+            <a:ext uri="{FF2B5EF4-FFF2-40B4-BE49-F238E27FC236}">
+              <a16:creationId xmlns:a16="http://schemas.microsoft.com/office/drawing/2014/main" id="{EB5FE249-4550-EE58-77E5-02C163B3D567}"/>
+            </a:ext>
+          </a:extLst>
+        </p:cNvPr>
         <p:cNvGrpSpPr/>
         <p:nvPr/>
       </p:nvGrpSpPr>
@@ -4891,187 +4844,107 @@
       </p:grpSpPr>
       <p:sp>
         <p:nvSpPr>
-          <p:cNvPr id="4" name="Title 3"/>
-          <p:cNvSpPr>
-            <a:spLocks noGrp="1"/>
-          </p:cNvSpPr>
-          <p:nvPr>
-            <p:ph type="title"/>
-          </p:nvPr>
-        </p:nvSpPr>
-        <p:spPr/>
-        <p:txBody>
-          <a:bodyPr>
+          <p:cNvPr id="5" name="內容版面配置區 4">
+            <a:extLst>
+              <a:ext uri="{FF2B5EF4-FFF2-40B4-BE49-F238E27FC236}">
+                <a16:creationId xmlns:a16="http://schemas.microsoft.com/office/drawing/2014/main" id="{08170172-25C1-92F1-C0E9-DCE9B98A0F27}"/>
+              </a:ext>
+            </a:extLst>
+          </p:cNvPr>
+          <p:cNvSpPr>
+            <a:spLocks noGrp="1"/>
+          </p:cNvSpPr>
+          <p:nvPr>
+            <p:ph idx="1"/>
+          </p:nvPr>
+        </p:nvSpPr>
+        <p:spPr>
+          <a:xfrm>
+            <a:off x="0" y="2084851"/>
+            <a:ext cx="12192000" cy="2404863"/>
+          </a:xfrm>
+        </p:spPr>
+        <p:txBody>
+          <a:bodyPr anchor="ctr">
             <a:normAutofit/>
           </a:bodyPr>
           <a:lstStyle/>
           <a:p>
-            <a:r>
-              <a:rPr lang="en-US" altLang="zh-CN" sz="4800" b="1" dirty="0">
+            <a:pPr marL="0" indent="0" algn="ctr">
+              <a:buNone/>
+            </a:pPr>
+            <a:r>
+              <a:rPr lang="zh-CN" altLang="zh-TW" sz="6400" b="1" dirty="0">
                 <a:solidFill>
                   <a:srgbClr val="660033"/>
                 </a:solidFill>
                 <a:latin typeface="Microsoft JhengHei" panose="020B0604030504040204" pitchFamily="34" charset="-120"/>
                 <a:ea typeface="Microsoft JhengHei" panose="020B0604030504040204" pitchFamily="34" charset="-120"/>
               </a:rPr>
-              <a:t>【</a:t>
-            </a:r>
-            <a:r>
-              <a:rPr lang="zh-CN" altLang="en-US" sz="4800" b="1" dirty="0">
+              <a:t>榮耀釋放者</a:t>
+            </a:r>
+            <a:r>
+              <a:rPr lang="en-US" altLang="zh-CN" sz="6400" b="1" dirty="0">
                 <a:solidFill>
                   <a:srgbClr val="660033"/>
                 </a:solidFill>
                 <a:latin typeface="Microsoft JhengHei" panose="020B0604030504040204" pitchFamily="34" charset="-120"/>
                 <a:ea typeface="Microsoft JhengHei" panose="020B0604030504040204" pitchFamily="34" charset="-120"/>
               </a:rPr>
-              <a:t>榮耀釋放</a:t>
-            </a:r>
-            <a:r>
-              <a:rPr lang="en-US" altLang="zh-CN" sz="4800" b="1" dirty="0">
+              <a:t>  </a:t>
+            </a:r>
+            <a:r>
+              <a:rPr lang="zh-CN" altLang="zh-TW" sz="6400" b="1" dirty="0">
                 <a:solidFill>
                   <a:srgbClr val="660033"/>
                 </a:solidFill>
                 <a:latin typeface="Microsoft JhengHei" panose="020B0604030504040204" pitchFamily="34" charset="-120"/>
                 <a:ea typeface="Microsoft JhengHei" panose="020B0604030504040204" pitchFamily="34" charset="-120"/>
               </a:rPr>
-              <a:t>】</a:t>
-            </a:r>
-          </a:p>
-        </p:txBody>
-      </p:sp>
-      <p:sp>
-        <p:nvSpPr>
-          <p:cNvPr id="5" name="Content Placeholder 4"/>
-          <p:cNvSpPr>
-            <a:spLocks noGrp="1"/>
-          </p:cNvSpPr>
-          <p:nvPr>
-            <p:ph idx="1"/>
-          </p:nvPr>
-        </p:nvSpPr>
-        <p:spPr/>
-        <p:txBody>
-          <a:bodyPr>
-            <a:noAutofit/>
-          </a:bodyPr>
-          <a:lstStyle/>
+              <a:t>是救主耶穌</a:t>
+            </a:r>
+          </a:p>
           <a:p>
             <a:pPr marL="0" indent="0" algn="ctr">
               <a:buNone/>
             </a:pPr>
             <a:r>
-              <a:rPr lang="zh-CN" altLang="zh-TW" sz="5400" b="1" dirty="0">
+              <a:rPr lang="zh-CN" altLang="zh-TW" sz="6400" b="1" dirty="0">
                 <a:solidFill>
                   <a:srgbClr val="660033"/>
                 </a:solidFill>
                 <a:latin typeface="Microsoft JhengHei" panose="020B0604030504040204" pitchFamily="34" charset="-120"/>
                 <a:ea typeface="Microsoft JhengHei" panose="020B0604030504040204" pitchFamily="34" charset="-120"/>
               </a:rPr>
-              <a:t>主使我脫離驕傲和愚昧</a:t>
-            </a:r>
-          </a:p>
-          <a:p>
-            <a:pPr marL="0" indent="0" algn="ctr">
-              <a:buNone/>
-            </a:pPr>
-            <a:r>
-              <a:rPr lang="zh-CN" altLang="zh-TW" sz="5400" b="1" dirty="0">
+              <a:t>從今到永遠</a:t>
+            </a:r>
+            <a:r>
+              <a:rPr lang="en-US" altLang="zh-CN" sz="6400" b="1" dirty="0">
                 <a:solidFill>
                   <a:srgbClr val="660033"/>
                 </a:solidFill>
                 <a:latin typeface="Microsoft JhengHei" panose="020B0604030504040204" pitchFamily="34" charset="-120"/>
                 <a:ea typeface="Microsoft JhengHei" panose="020B0604030504040204" pitchFamily="34" charset="-120"/>
               </a:rPr>
-              <a:t>脫離我溺愛金錢迷惑</a:t>
-            </a:r>
-          </a:p>
-          <a:p>
-            <a:pPr marL="0" indent="0" algn="ctr">
-              <a:buNone/>
-            </a:pPr>
-            <a:r>
-              <a:rPr lang="zh-CN" altLang="zh-TW" sz="5400" b="1" dirty="0">
+              <a:t>  </a:t>
+            </a:r>
+            <a:r>
+              <a:rPr lang="zh-CN" altLang="zh-TW" sz="6400" b="1" dirty="0">
                 <a:solidFill>
                   <a:srgbClr val="660033"/>
                 </a:solidFill>
                 <a:latin typeface="Microsoft JhengHei" panose="020B0604030504040204" pitchFamily="34" charset="-120"/>
                 <a:ea typeface="Microsoft JhengHei" panose="020B0604030504040204" pitchFamily="34" charset="-120"/>
               </a:rPr>
-              <a:t>脫離我惱怒暴躁之性情</a:t>
-            </a:r>
-          </a:p>
-          <a:p>
-            <a:pPr marL="0" indent="0" algn="ctr">
-              <a:buNone/>
-            </a:pPr>
-            <a:r>
-              <a:rPr lang="zh-CN" altLang="zh-TW" sz="5400" b="1" dirty="0">
-                <a:solidFill>
-                  <a:srgbClr val="660033"/>
-                </a:solidFill>
-                <a:latin typeface="Microsoft JhengHei" panose="020B0604030504040204" pitchFamily="34" charset="-120"/>
-                <a:ea typeface="Microsoft JhengHei" panose="020B0604030504040204" pitchFamily="34" charset="-120"/>
-              </a:rPr>
-              <a:t>榮耀之釋放無窮喜樂</a:t>
-            </a:r>
-          </a:p>
-        </p:txBody>
-      </p:sp>
-      <p:sp>
-        <p:nvSpPr>
-          <p:cNvPr id="6" name="Text Box 1"/>
-          <p:cNvSpPr txBox="1"/>
-          <p:nvPr/>
-        </p:nvSpPr>
-        <p:spPr>
-          <a:xfrm>
-            <a:off x="767408" y="1700808"/>
-            <a:ext cx="1055440" cy="923330"/>
-          </a:xfrm>
-          <a:prstGeom prst="rect">
-            <a:avLst/>
-          </a:prstGeom>
-          <a:noFill/>
-          <a:ln w="9525">
-            <a:noFill/>
-            <a:miter lim="800000"/>
-          </a:ln>
-        </p:spPr>
-        <p:txBody>
-          <a:bodyPr wrap="square">
-            <a:spAutoFit/>
-          </a:bodyPr>
-          <a:lstStyle/>
-          <a:p>
-            <a:pPr algn="ctr"/>
-            <a:r>
-              <a:rPr lang="en-US" sz="5400" b="1" dirty="0">
-                <a:solidFill>
-                  <a:srgbClr val="660033"/>
-                </a:solidFill>
-              </a:rPr>
-              <a:t>3</a:t>
-            </a:r>
-            <a:r>
-              <a:rPr lang="en-US" sz="5400" b="1" dirty="0" smtClean="0">
-                <a:solidFill>
-                  <a:srgbClr val="660033"/>
-                </a:solidFill>
-              </a:rPr>
-              <a:t>.</a:t>
-            </a:r>
-            <a:endParaRPr lang="en-US" sz="5400" b="1" dirty="0">
-              <a:solidFill>
-                <a:srgbClr val="660033"/>
-              </a:solidFill>
-            </a:endParaRPr>
+              <a:t>使我釋放</a:t>
+            </a:r>
           </a:p>
         </p:txBody>
       </p:sp>
     </p:spTree>
     <p:extLst>
       <p:ext uri="{BB962C8B-B14F-4D97-AF65-F5344CB8AC3E}">
-        <p14:creationId xmlns:p14="http://schemas.microsoft.com/office/powerpoint/2010/main" val="2161959297"/>
+        <p14:creationId xmlns:p14="http://schemas.microsoft.com/office/powerpoint/2010/main" val="2673604520"/>
       </p:ext>
     </p:extLst>
   </p:cSld>
@@ -5086,7 +4959,13 @@
   <p:cSld>
     <p:spTree>
       <p:nvGrpSpPr>
-        <p:cNvPr id="1" name=""/>
+        <p:cNvPr id="1" name="">
+          <a:extLst>
+            <a:ext uri="{FF2B5EF4-FFF2-40B4-BE49-F238E27FC236}">
+              <a16:creationId xmlns:a16="http://schemas.microsoft.com/office/drawing/2014/main" id="{08A6060F-1FA3-57EC-A495-752839DB13CF}"/>
+            </a:ext>
+          </a:extLst>
+        </p:cNvPr>
         <p:cNvGrpSpPr/>
         <p:nvPr/>
       </p:nvGrpSpPr>
@@ -5100,96 +4979,347 @@
       </p:grpSpPr>
       <p:sp>
         <p:nvSpPr>
-          <p:cNvPr id="4" name="Title 3"/>
-          <p:cNvSpPr>
-            <a:spLocks noGrp="1"/>
-          </p:cNvSpPr>
-          <p:nvPr>
-            <p:ph type="title"/>
-          </p:nvPr>
-        </p:nvSpPr>
-        <p:spPr/>
-        <p:txBody>
-          <a:bodyPr>
+          <p:cNvPr id="5" name="內容版面配置區 4">
+            <a:extLst>
+              <a:ext uri="{FF2B5EF4-FFF2-40B4-BE49-F238E27FC236}">
+                <a16:creationId xmlns:a16="http://schemas.microsoft.com/office/drawing/2014/main" id="{BF20D876-0497-BCB5-E331-284A0FAA46E5}"/>
+              </a:ext>
+            </a:extLst>
+          </p:cNvPr>
+          <p:cNvSpPr>
+            <a:spLocks noGrp="1"/>
+          </p:cNvSpPr>
+          <p:nvPr>
+            <p:ph idx="1"/>
+          </p:nvPr>
+        </p:nvSpPr>
+        <p:spPr>
+          <a:xfrm>
+            <a:off x="0" y="2084851"/>
+            <a:ext cx="12192000" cy="2404863"/>
+          </a:xfrm>
+        </p:spPr>
+        <p:txBody>
+          <a:bodyPr anchor="ctr">
             <a:normAutofit/>
           </a:bodyPr>
           <a:lstStyle/>
           <a:p>
-            <a:r>
-              <a:rPr lang="en-US" altLang="zh-CN" sz="4800" b="1" dirty="0">
+            <a:pPr marL="0" indent="0" algn="ctr">
+              <a:buNone/>
+            </a:pPr>
+            <a:r>
+              <a:rPr lang="zh-CN" altLang="zh-TW" sz="6400" b="1" dirty="0">
                 <a:solidFill>
                   <a:srgbClr val="660033"/>
                 </a:solidFill>
                 <a:latin typeface="Microsoft JhengHei" panose="020B0604030504040204" pitchFamily="34" charset="-120"/>
                 <a:ea typeface="Microsoft JhengHei" panose="020B0604030504040204" pitchFamily="34" charset="-120"/>
               </a:rPr>
-              <a:t>【</a:t>
-            </a:r>
-            <a:r>
-              <a:rPr lang="zh-CN" altLang="en-US" sz="4800" b="1" dirty="0">
+              <a:t>主使我脫離情慾和嗜好</a:t>
+            </a:r>
+          </a:p>
+          <a:p>
+            <a:pPr marL="0" indent="0" algn="ctr">
+              <a:buNone/>
+            </a:pPr>
+            <a:r>
+              <a:rPr lang="zh-CN" altLang="zh-TW" sz="6400" b="1" dirty="0">
                 <a:solidFill>
                   <a:srgbClr val="660033"/>
                 </a:solidFill>
                 <a:latin typeface="Microsoft JhengHei" panose="020B0604030504040204" pitchFamily="34" charset="-120"/>
                 <a:ea typeface="Microsoft JhengHei" panose="020B0604030504040204" pitchFamily="34" charset="-120"/>
               </a:rPr>
-              <a:t>榮耀釋放</a:t>
-            </a:r>
-            <a:r>
-              <a:rPr lang="en-US" altLang="zh-CN" sz="4800" b="1" dirty="0">
+              <a:t>脫離我妒忌恨惡狂傲</a:t>
+            </a:r>
+          </a:p>
+        </p:txBody>
+      </p:sp>
+      <p:sp>
+        <p:nvSpPr>
+          <p:cNvPr id="3" name="TextBox 2">
+            <a:extLst>
+              <a:ext uri="{FF2B5EF4-FFF2-40B4-BE49-F238E27FC236}">
+                <a16:creationId xmlns:a16="http://schemas.microsoft.com/office/drawing/2014/main" id="{E800402B-C3BF-2E83-A943-C169F8007D5E}"/>
+              </a:ext>
+            </a:extLst>
+          </p:cNvPr>
+          <p:cNvSpPr txBox="1"/>
+          <p:nvPr/>
+        </p:nvSpPr>
+        <p:spPr>
+          <a:xfrm>
+            <a:off x="0" y="5061182"/>
+            <a:ext cx="12192000" cy="584775"/>
+          </a:xfrm>
+          <a:prstGeom prst="rect">
+            <a:avLst/>
+          </a:prstGeom>
+          <a:noFill/>
+        </p:spPr>
+        <p:txBody>
+          <a:bodyPr wrap="square" rtlCol="0">
+            <a:spAutoFit/>
+          </a:bodyPr>
+          <a:lstStyle/>
+          <a:p>
+            <a:pPr algn="ctr"/>
+            <a:r>
+              <a:rPr lang="en-US" sz="3200" b="1" dirty="0">
+                <a:solidFill>
+                  <a:srgbClr val="660033"/>
+                </a:solidFill>
+              </a:rPr>
+              <a:t>( 2 / 3 )</a:t>
+            </a:r>
+            <a:endParaRPr lang="vi-VN" sz="3200" b="1" dirty="0">
+              <a:solidFill>
+                <a:srgbClr val="660033"/>
+              </a:solidFill>
+            </a:endParaRPr>
+          </a:p>
+        </p:txBody>
+      </p:sp>
+    </p:spTree>
+    <p:extLst>
+      <p:ext uri="{BB962C8B-B14F-4D97-AF65-F5344CB8AC3E}">
+        <p14:creationId xmlns:p14="http://schemas.microsoft.com/office/powerpoint/2010/main" val="1844312638"/>
+      </p:ext>
+    </p:extLst>
+  </p:cSld>
+  <p:clrMapOvr>
+    <a:masterClrMapping/>
+  </p:clrMapOvr>
+</p:sld>
+</file>
+
+<file path=ppt/slides/slide7.xml><?xml version="1.0" encoding="utf-8"?>
+<p:sld xmlns:a="http://schemas.openxmlformats.org/drawingml/2006/main" xmlns:r="http://schemas.openxmlformats.org/officeDocument/2006/relationships" xmlns:p="http://schemas.openxmlformats.org/presentationml/2006/main">
+  <p:cSld>
+    <p:spTree>
+      <p:nvGrpSpPr>
+        <p:cNvPr id="1" name="">
+          <a:extLst>
+            <a:ext uri="{FF2B5EF4-FFF2-40B4-BE49-F238E27FC236}">
+              <a16:creationId xmlns:a16="http://schemas.microsoft.com/office/drawing/2014/main" id="{843B4550-EE07-543F-A57F-6838D4EB8C37}"/>
+            </a:ext>
+          </a:extLst>
+        </p:cNvPr>
+        <p:cNvGrpSpPr/>
+        <p:nvPr/>
+      </p:nvGrpSpPr>
+      <p:grpSpPr>
+        <a:xfrm>
+          <a:off x="0" y="0"/>
+          <a:ext cx="0" cy="0"/>
+          <a:chOff x="0" y="0"/>
+          <a:chExt cx="0" cy="0"/>
+        </a:xfrm>
+      </p:grpSpPr>
+      <p:sp>
+        <p:nvSpPr>
+          <p:cNvPr id="5" name="內容版面配置區 4">
+            <a:extLst>
+              <a:ext uri="{FF2B5EF4-FFF2-40B4-BE49-F238E27FC236}">
+                <a16:creationId xmlns:a16="http://schemas.microsoft.com/office/drawing/2014/main" id="{ED83C266-4F46-CD0B-E025-3FF759107132}"/>
+              </a:ext>
+            </a:extLst>
+          </p:cNvPr>
+          <p:cNvSpPr>
+            <a:spLocks noGrp="1"/>
+          </p:cNvSpPr>
+          <p:nvPr>
+            <p:ph idx="1"/>
+          </p:nvPr>
+        </p:nvSpPr>
+        <p:spPr>
+          <a:xfrm>
+            <a:off x="0" y="2084851"/>
+            <a:ext cx="12192000" cy="2404863"/>
+          </a:xfrm>
+        </p:spPr>
+        <p:txBody>
+          <a:bodyPr anchor="ctr">
+            <a:normAutofit/>
+          </a:bodyPr>
+          <a:lstStyle/>
+          <a:p>
+            <a:pPr marL="0" indent="0" algn="ctr">
+              <a:buNone/>
+            </a:pPr>
+            <a:r>
+              <a:rPr lang="zh-CN" altLang="zh-TW" sz="6400" b="1" dirty="0">
                 <a:solidFill>
                   <a:srgbClr val="660033"/>
                 </a:solidFill>
                 <a:latin typeface="Microsoft JhengHei" panose="020B0604030504040204" pitchFamily="34" charset="-120"/>
                 <a:ea typeface="Microsoft JhengHei" panose="020B0604030504040204" pitchFamily="34" charset="-120"/>
               </a:rPr>
-              <a:t>】</a:t>
-            </a:r>
-          </a:p>
-        </p:txBody>
-      </p:sp>
-      <p:sp>
-        <p:nvSpPr>
-          <p:cNvPr id="5" name="Content Placeholder 4"/>
-          <p:cNvSpPr>
-            <a:spLocks noGrp="1"/>
-          </p:cNvSpPr>
-          <p:nvPr>
-            <p:ph idx="1"/>
-          </p:nvPr>
-        </p:nvSpPr>
-        <p:spPr/>
-        <p:txBody>
-          <a:bodyPr>
-            <a:noAutofit/>
-          </a:bodyPr>
-          <a:lstStyle/>
-          <a:p>
-            <a:pPr marL="0" indent="0" algn="ctr">
-              <a:buNone/>
-            </a:pPr>
-            <a:r>
-              <a:rPr lang="zh-CN" altLang="zh-TW" sz="5400" b="1" dirty="0">
+              <a:t>脫離我世俗虛空之</a:t>
+            </a:r>
+            <a:r>
+              <a:rPr lang="en-US" altLang="zh-CN" sz="6400" b="1" dirty="0">
                 <a:solidFill>
                   <a:srgbClr val="660033"/>
                 </a:solidFill>
                 <a:latin typeface="Microsoft JhengHei" panose="020B0604030504040204" pitchFamily="34" charset="-120"/>
                 <a:ea typeface="Microsoft JhengHei" panose="020B0604030504040204" pitchFamily="34" charset="-120"/>
               </a:rPr>
-              <a:t>榮耀之釋</a:t>
-            </a:r>
-            <a:r>
-              <a:rPr lang="zh-CN" altLang="zh-TW" sz="5400" b="1" dirty="0">
+              <a:t>幻</a:t>
+            </a:r>
+            <a:r>
+              <a:rPr lang="zh-CN" altLang="en-US" sz="6400" b="1" dirty="0">
                 <a:solidFill>
                   <a:srgbClr val="660033"/>
                 </a:solidFill>
                 <a:latin typeface="Microsoft JhengHei" panose="020B0604030504040204" pitchFamily="34" charset="-120"/>
                 <a:ea typeface="Microsoft JhengHei" panose="020B0604030504040204" pitchFamily="34" charset="-120"/>
               </a:rPr>
-              <a:t>放</a:t>
-            </a:r>
-            <a:r>
-              <a:rPr lang="en-US" altLang="zh-CN" sz="5400" b="1" dirty="0">
+              <a:t>想</a:t>
+            </a:r>
+          </a:p>
+          <a:p>
+            <a:pPr marL="0" indent="0" algn="ctr">
+              <a:buNone/>
+            </a:pPr>
+            <a:r>
+              <a:rPr lang="zh-CN" altLang="en-US" sz="6400" b="1" dirty="0">
+                <a:solidFill>
+                  <a:srgbClr val="660033"/>
+                </a:solidFill>
+                <a:latin typeface="Microsoft JhengHei" panose="020B0604030504040204" pitchFamily="34" charset="-120"/>
+                <a:ea typeface="Microsoft JhengHei" panose="020B0604030504040204" pitchFamily="34" charset="-120"/>
+              </a:rPr>
+              <a:t>亦使我離去一切憂勞</a:t>
+            </a:r>
+          </a:p>
+        </p:txBody>
+      </p:sp>
+      <p:sp>
+        <p:nvSpPr>
+          <p:cNvPr id="3" name="TextBox 2">
+            <a:extLst>
+              <a:ext uri="{FF2B5EF4-FFF2-40B4-BE49-F238E27FC236}">
+                <a16:creationId xmlns:a16="http://schemas.microsoft.com/office/drawing/2014/main" id="{3D276ADD-D572-8485-A118-2E98091D2201}"/>
+              </a:ext>
+            </a:extLst>
+          </p:cNvPr>
+          <p:cNvSpPr txBox="1"/>
+          <p:nvPr/>
+        </p:nvSpPr>
+        <p:spPr>
+          <a:xfrm>
+            <a:off x="0" y="5061182"/>
+            <a:ext cx="12192000" cy="584775"/>
+          </a:xfrm>
+          <a:prstGeom prst="rect">
+            <a:avLst/>
+          </a:prstGeom>
+          <a:noFill/>
+        </p:spPr>
+        <p:txBody>
+          <a:bodyPr wrap="square" rtlCol="0">
+            <a:spAutoFit/>
+          </a:bodyPr>
+          <a:lstStyle/>
+          <a:p>
+            <a:pPr algn="ctr"/>
+            <a:r>
+              <a:rPr lang="en-US" sz="3200" b="1" dirty="0">
+                <a:solidFill>
+                  <a:srgbClr val="660033"/>
+                </a:solidFill>
+              </a:rPr>
+              <a:t>( 2 / 3 )</a:t>
+            </a:r>
+            <a:endParaRPr lang="vi-VN" sz="3200" b="1" dirty="0">
+              <a:solidFill>
+                <a:srgbClr val="660033"/>
+              </a:solidFill>
+            </a:endParaRPr>
+          </a:p>
+        </p:txBody>
+      </p:sp>
+    </p:spTree>
+    <p:extLst>
+      <p:ext uri="{BB962C8B-B14F-4D97-AF65-F5344CB8AC3E}">
+        <p14:creationId xmlns:p14="http://schemas.microsoft.com/office/powerpoint/2010/main" val="3800579391"/>
+      </p:ext>
+    </p:extLst>
+  </p:cSld>
+  <p:clrMapOvr>
+    <a:masterClrMapping/>
+  </p:clrMapOvr>
+</p:sld>
+</file>
+
+<file path=ppt/slides/slide8.xml><?xml version="1.0" encoding="utf-8"?>
+<p:sld xmlns:a="http://schemas.openxmlformats.org/drawingml/2006/main" xmlns:r="http://schemas.openxmlformats.org/officeDocument/2006/relationships" xmlns:p="http://schemas.openxmlformats.org/presentationml/2006/main">
+  <p:cSld>
+    <p:spTree>
+      <p:nvGrpSpPr>
+        <p:cNvPr id="1" name="">
+          <a:extLst>
+            <a:ext uri="{FF2B5EF4-FFF2-40B4-BE49-F238E27FC236}">
+              <a16:creationId xmlns:a16="http://schemas.microsoft.com/office/drawing/2014/main" id="{26CCFDA3-4D00-7B6C-BC55-C625EE8400D3}"/>
+            </a:ext>
+          </a:extLst>
+        </p:cNvPr>
+        <p:cNvGrpSpPr/>
+        <p:nvPr/>
+      </p:nvGrpSpPr>
+      <p:grpSpPr>
+        <a:xfrm>
+          <a:off x="0" y="0"/>
+          <a:ext cx="0" cy="0"/>
+          <a:chOff x="0" y="0"/>
+          <a:chExt cx="0" cy="0"/>
+        </a:xfrm>
+      </p:grpSpPr>
+      <p:sp>
+        <p:nvSpPr>
+          <p:cNvPr id="5" name="內容版面配置區 4">
+            <a:extLst>
+              <a:ext uri="{FF2B5EF4-FFF2-40B4-BE49-F238E27FC236}">
+                <a16:creationId xmlns:a16="http://schemas.microsoft.com/office/drawing/2014/main" id="{9FE36280-FF70-0CE8-8D7F-D7E02FF68E44}"/>
+              </a:ext>
+            </a:extLst>
+          </p:cNvPr>
+          <p:cNvSpPr>
+            <a:spLocks noGrp="1"/>
+          </p:cNvSpPr>
+          <p:nvPr>
+            <p:ph idx="1"/>
+          </p:nvPr>
+        </p:nvSpPr>
+        <p:spPr>
+          <a:xfrm>
+            <a:off x="0" y="2084851"/>
+            <a:ext cx="12192000" cy="2404863"/>
+          </a:xfrm>
+        </p:spPr>
+        <p:txBody>
+          <a:bodyPr anchor="ctr">
+            <a:normAutofit/>
+          </a:bodyPr>
+          <a:lstStyle/>
+          <a:p>
+            <a:pPr marL="0" indent="0" algn="ctr">
+              <a:buNone/>
+            </a:pPr>
+            <a:r>
+              <a:rPr lang="zh-CN" altLang="zh-TW" sz="6400" b="1" dirty="0">
+                <a:solidFill>
+                  <a:srgbClr val="660033"/>
+                </a:solidFill>
+                <a:latin typeface="Microsoft JhengHei" panose="020B0604030504040204" pitchFamily="34" charset="-120"/>
+                <a:ea typeface="Microsoft JhengHei" panose="020B0604030504040204" pitchFamily="34" charset="-120"/>
+              </a:rPr>
+              <a:t>榮耀之釋放</a:t>
+            </a:r>
+            <a:r>
+              <a:rPr lang="en-US" altLang="zh-CN" sz="6400" b="1" dirty="0">
                 <a:solidFill>
                   <a:srgbClr val="660033"/>
                 </a:solidFill>
@@ -5199,52 +5329,32 @@
               <a:t>  </a:t>
             </a:r>
             <a:r>
-              <a:rPr lang="zh-CN" altLang="zh-TW" sz="5400" b="1" dirty="0">
+              <a:rPr lang="zh-CN" altLang="zh-TW" sz="6400" b="1" dirty="0">
                 <a:solidFill>
                   <a:srgbClr val="660033"/>
                 </a:solidFill>
                 <a:latin typeface="Microsoft JhengHei" panose="020B0604030504040204" pitchFamily="34" charset="-120"/>
                 <a:ea typeface="Microsoft JhengHei" panose="020B0604030504040204" pitchFamily="34" charset="-120"/>
               </a:rPr>
-              <a:t>奇</a:t>
-            </a:r>
-            <a:r>
-              <a:rPr lang="zh-CN" altLang="zh-TW" sz="5400" b="1" dirty="0">
+              <a:t>奇妙之釋放</a:t>
+            </a:r>
+          </a:p>
+          <a:p>
+            <a:pPr marL="0" indent="0" algn="ctr">
+              <a:buNone/>
+            </a:pPr>
+            <a:r>
+              <a:rPr lang="zh-CN" altLang="zh-TW" sz="6400" b="1" dirty="0">
                 <a:solidFill>
                   <a:srgbClr val="660033"/>
                 </a:solidFill>
                 <a:latin typeface="Microsoft JhengHei" panose="020B0604030504040204" pitchFamily="34" charset="-120"/>
                 <a:ea typeface="Microsoft JhengHei" panose="020B0604030504040204" pitchFamily="34" charset="-120"/>
               </a:rPr>
-              <a:t>妙之釋放</a:t>
-            </a:r>
-          </a:p>
-          <a:p>
-            <a:pPr marL="0" indent="0" algn="ctr">
-              <a:buNone/>
-            </a:pPr>
-            <a:r>
-              <a:rPr lang="zh-CN" altLang="zh-TW" sz="5400" b="1" dirty="0">
-                <a:solidFill>
-                  <a:srgbClr val="660033"/>
-                </a:solidFill>
-                <a:latin typeface="Microsoft JhengHei" panose="020B0604030504040204" pitchFamily="34" charset="-120"/>
-                <a:ea typeface="Microsoft JhengHei" panose="020B0604030504040204" pitchFamily="34" charset="-120"/>
-              </a:rPr>
-              <a:t>我再無罪</a:t>
-            </a:r>
-            <a:r>
-              <a:rPr lang="zh-CN" altLang="zh-TW" sz="5400" b="1" dirty="0">
-                <a:solidFill>
-                  <a:srgbClr val="660033"/>
-                </a:solidFill>
-                <a:latin typeface="Microsoft JhengHei" panose="020B0604030504040204" pitchFamily="34" charset="-120"/>
-                <a:ea typeface="Microsoft JhengHei" panose="020B0604030504040204" pitchFamily="34" charset="-120"/>
-              </a:rPr>
-              <a:t>惡</a:t>
-            </a:r>
-            <a:r>
-              <a:rPr lang="en-US" altLang="zh-CN" sz="5400" b="1" dirty="0">
+              <a:t>我再無罪惡</a:t>
+            </a:r>
+            <a:r>
+              <a:rPr lang="en-US" altLang="zh-CN" sz="6400" b="1" dirty="0">
                 <a:solidFill>
                   <a:srgbClr val="660033"/>
                 </a:solidFill>
@@ -5254,36 +5364,16 @@
               <a:t>  </a:t>
             </a:r>
             <a:r>
-              <a:rPr lang="zh-CN" altLang="zh-TW" sz="5400" b="1" dirty="0">
+              <a:rPr lang="zh-CN" altLang="zh-TW" sz="6400" b="1" dirty="0">
                 <a:solidFill>
                   <a:srgbClr val="660033"/>
                 </a:solidFill>
                 <a:latin typeface="Microsoft JhengHei" panose="020B0604030504040204" pitchFamily="34" charset="-120"/>
                 <a:ea typeface="Microsoft JhengHei" panose="020B0604030504040204" pitchFamily="34" charset="-120"/>
               </a:rPr>
-              <a:t>束</a:t>
-            </a:r>
-            <a:r>
-              <a:rPr lang="zh-CN" altLang="zh-TW" sz="5400" b="1" dirty="0">
-                <a:solidFill>
-                  <a:srgbClr val="660033"/>
-                </a:solidFill>
-                <a:latin typeface="Microsoft JhengHei" panose="020B0604030504040204" pitchFamily="34" charset="-120"/>
-                <a:ea typeface="Microsoft JhengHei" panose="020B0604030504040204" pitchFamily="34" charset="-120"/>
-              </a:rPr>
-              <a:t>縛痛</a:t>
-            </a:r>
-            <a:r>
-              <a:rPr lang="zh-CN" altLang="zh-TW" sz="5400" b="1" dirty="0">
-                <a:solidFill>
-                  <a:srgbClr val="660033"/>
-                </a:solidFill>
-                <a:latin typeface="Microsoft JhengHei" panose="020B0604030504040204" pitchFamily="34" charset="-120"/>
-                <a:ea typeface="Microsoft JhengHei" panose="020B0604030504040204" pitchFamily="34" charset="-120"/>
-              </a:rPr>
-              <a:t>苦</a:t>
-            </a:r>
-            <a:endParaRPr lang="en-US" altLang="zh-CN" sz="5400" b="1" dirty="0">
+              <a:t>束縛痛苦</a:t>
+            </a:r>
+            <a:endParaRPr lang="en-US" altLang="zh-CN" sz="6400" b="1" dirty="0">
               <a:solidFill>
                 <a:srgbClr val="660033"/>
               </a:solidFill>
@@ -5291,32 +5381,87 @@
               <a:ea typeface="Microsoft JhengHei" panose="020B0604030504040204" pitchFamily="34" charset="-120"/>
             </a:endParaRPr>
           </a:p>
+        </p:txBody>
+      </p:sp>
+    </p:spTree>
+    <p:extLst>
+      <p:ext uri="{BB962C8B-B14F-4D97-AF65-F5344CB8AC3E}">
+        <p14:creationId xmlns:p14="http://schemas.microsoft.com/office/powerpoint/2010/main" val="3445494571"/>
+      </p:ext>
+    </p:extLst>
+  </p:cSld>
+  <p:clrMapOvr>
+    <a:masterClrMapping/>
+  </p:clrMapOvr>
+</p:sld>
+</file>
+
+<file path=ppt/slides/slide9.xml><?xml version="1.0" encoding="utf-8"?>
+<p:sld xmlns:a="http://schemas.openxmlformats.org/drawingml/2006/main" xmlns:r="http://schemas.openxmlformats.org/officeDocument/2006/relationships" xmlns:p="http://schemas.openxmlformats.org/presentationml/2006/main">
+  <p:cSld>
+    <p:spTree>
+      <p:nvGrpSpPr>
+        <p:cNvPr id="1" name="">
+          <a:extLst>
+            <a:ext uri="{FF2B5EF4-FFF2-40B4-BE49-F238E27FC236}">
+              <a16:creationId xmlns:a16="http://schemas.microsoft.com/office/drawing/2014/main" id="{85012670-6B20-52B0-BE13-A6133C528279}"/>
+            </a:ext>
+          </a:extLst>
+        </p:cNvPr>
+        <p:cNvGrpSpPr/>
+        <p:nvPr/>
+      </p:nvGrpSpPr>
+      <p:grpSpPr>
+        <a:xfrm>
+          <a:off x="0" y="0"/>
+          <a:ext cx="0" cy="0"/>
+          <a:chOff x="0" y="0"/>
+          <a:chExt cx="0" cy="0"/>
+        </a:xfrm>
+      </p:grpSpPr>
+      <p:sp>
+        <p:nvSpPr>
+          <p:cNvPr id="5" name="內容版面配置區 4">
+            <a:extLst>
+              <a:ext uri="{FF2B5EF4-FFF2-40B4-BE49-F238E27FC236}">
+                <a16:creationId xmlns:a16="http://schemas.microsoft.com/office/drawing/2014/main" id="{B6EC5C4F-3A04-24ED-8655-F51089D2605E}"/>
+              </a:ext>
+            </a:extLst>
+          </p:cNvPr>
+          <p:cNvSpPr>
+            <a:spLocks noGrp="1"/>
+          </p:cNvSpPr>
+          <p:nvPr>
+            <p:ph idx="1"/>
+          </p:nvPr>
+        </p:nvSpPr>
+        <p:spPr>
+          <a:xfrm>
+            <a:off x="0" y="2084851"/>
+            <a:ext cx="12192000" cy="2404863"/>
+          </a:xfrm>
+        </p:spPr>
+        <p:txBody>
+          <a:bodyPr anchor="ctr">
+            <a:normAutofit/>
+          </a:bodyPr>
+          <a:lstStyle/>
           <a:p>
             <a:pPr marL="0" indent="0" algn="ctr">
               <a:buNone/>
             </a:pPr>
             <a:r>
-              <a:rPr lang="zh-CN" altLang="zh-TW" sz="5400" b="1" dirty="0">
+              <a:rPr lang="zh-CN" altLang="zh-TW" sz="6400" b="1" dirty="0">
                 <a:solidFill>
                   <a:srgbClr val="660033"/>
                 </a:solidFill>
                 <a:latin typeface="Microsoft JhengHei" panose="020B0604030504040204" pitchFamily="34" charset="-120"/>
                 <a:ea typeface="Microsoft JhengHei" panose="020B0604030504040204" pitchFamily="34" charset="-120"/>
               </a:rPr>
-              <a:t>榮耀釋放</a:t>
-            </a:r>
-            <a:r>
-              <a:rPr lang="zh-CN" altLang="zh-TW" sz="5400" b="1" dirty="0">
-                <a:solidFill>
-                  <a:srgbClr val="660033"/>
-                </a:solidFill>
-                <a:latin typeface="Microsoft JhengHei" panose="020B0604030504040204" pitchFamily="34" charset="-120"/>
-                <a:ea typeface="Microsoft JhengHei" panose="020B0604030504040204" pitchFamily="34" charset="-120"/>
-              </a:rPr>
-              <a:t>者</a:t>
-            </a:r>
-            <a:r>
-              <a:rPr lang="en-US" altLang="zh-CN" sz="5400" b="1" dirty="0">
+              <a:t>榮耀釋放者</a:t>
+            </a:r>
+            <a:r>
+              <a:rPr lang="en-US" altLang="zh-CN" sz="6400" b="1" dirty="0">
                 <a:solidFill>
                   <a:srgbClr val="660033"/>
                 </a:solidFill>
@@ -5326,52 +5471,32 @@
               <a:t>  </a:t>
             </a:r>
             <a:r>
-              <a:rPr lang="zh-CN" altLang="zh-TW" sz="5400" b="1" dirty="0">
+              <a:rPr lang="zh-CN" altLang="zh-TW" sz="6400" b="1" dirty="0">
                 <a:solidFill>
                   <a:srgbClr val="660033"/>
                 </a:solidFill>
                 <a:latin typeface="Microsoft JhengHei" panose="020B0604030504040204" pitchFamily="34" charset="-120"/>
                 <a:ea typeface="Microsoft JhengHei" panose="020B0604030504040204" pitchFamily="34" charset="-120"/>
               </a:rPr>
-              <a:t>是</a:t>
-            </a:r>
-            <a:r>
-              <a:rPr lang="zh-CN" altLang="zh-TW" sz="5400" b="1" dirty="0">
+              <a:t>是救主耶穌</a:t>
+            </a:r>
+          </a:p>
+          <a:p>
+            <a:pPr marL="0" indent="0" algn="ctr">
+              <a:buNone/>
+            </a:pPr>
+            <a:r>
+              <a:rPr lang="zh-CN" altLang="zh-TW" sz="6400" b="1" dirty="0">
                 <a:solidFill>
                   <a:srgbClr val="660033"/>
                 </a:solidFill>
                 <a:latin typeface="Microsoft JhengHei" panose="020B0604030504040204" pitchFamily="34" charset="-120"/>
                 <a:ea typeface="Microsoft JhengHei" panose="020B0604030504040204" pitchFamily="34" charset="-120"/>
               </a:rPr>
-              <a:t>救主耶穌</a:t>
-            </a:r>
-          </a:p>
-          <a:p>
-            <a:pPr marL="0" indent="0" algn="ctr">
-              <a:buNone/>
-            </a:pPr>
-            <a:r>
-              <a:rPr lang="zh-CN" altLang="zh-TW" sz="5400" b="1" dirty="0">
-                <a:solidFill>
-                  <a:srgbClr val="660033"/>
-                </a:solidFill>
-                <a:latin typeface="Microsoft JhengHei" panose="020B0604030504040204" pitchFamily="34" charset="-120"/>
-                <a:ea typeface="Microsoft JhengHei" panose="020B0604030504040204" pitchFamily="34" charset="-120"/>
-              </a:rPr>
-              <a:t>從今到永</a:t>
-            </a:r>
-            <a:r>
-              <a:rPr lang="zh-CN" altLang="zh-TW" sz="5400" b="1" dirty="0">
-                <a:solidFill>
-                  <a:srgbClr val="660033"/>
-                </a:solidFill>
-                <a:latin typeface="Microsoft JhengHei" panose="020B0604030504040204" pitchFamily="34" charset="-120"/>
-                <a:ea typeface="Microsoft JhengHei" panose="020B0604030504040204" pitchFamily="34" charset="-120"/>
-              </a:rPr>
-              <a:t>遠</a:t>
-            </a:r>
-            <a:r>
-              <a:rPr lang="en-US" altLang="zh-CN" sz="5400" b="1" dirty="0">
+              <a:t>從今到永遠</a:t>
+            </a:r>
+            <a:r>
+              <a:rPr lang="en-US" altLang="zh-CN" sz="6400" b="1" dirty="0">
                 <a:solidFill>
                   <a:srgbClr val="660033"/>
                 </a:solidFill>
@@ -5381,49 +5506,22 @@
               <a:t>  </a:t>
             </a:r>
             <a:r>
-              <a:rPr lang="zh-CN" altLang="zh-TW" sz="5400" b="1" dirty="0">
+              <a:rPr lang="zh-CN" altLang="zh-TW" sz="6400" b="1" dirty="0">
                 <a:solidFill>
                   <a:srgbClr val="660033"/>
                 </a:solidFill>
                 <a:latin typeface="Microsoft JhengHei" panose="020B0604030504040204" pitchFamily="34" charset="-120"/>
                 <a:ea typeface="Microsoft JhengHei" panose="020B0604030504040204" pitchFamily="34" charset="-120"/>
               </a:rPr>
-              <a:t>使</a:t>
-            </a:r>
-            <a:r>
-              <a:rPr lang="zh-CN" altLang="zh-TW" sz="5400" b="1" dirty="0">
-                <a:solidFill>
-                  <a:srgbClr val="660033"/>
-                </a:solidFill>
-                <a:latin typeface="Microsoft JhengHei" panose="020B0604030504040204" pitchFamily="34" charset="-120"/>
-                <a:ea typeface="Microsoft JhengHei" panose="020B0604030504040204" pitchFamily="34" charset="-120"/>
-              </a:rPr>
-              <a:t>我釋</a:t>
-            </a:r>
-            <a:r>
-              <a:rPr lang="zh-CN" altLang="zh-TW" sz="5400" b="1" dirty="0">
-                <a:solidFill>
-                  <a:srgbClr val="660033"/>
-                </a:solidFill>
-                <a:latin typeface="Microsoft JhengHei" panose="020B0604030504040204" pitchFamily="34" charset="-120"/>
-                <a:ea typeface="Microsoft JhengHei" panose="020B0604030504040204" pitchFamily="34" charset="-120"/>
-              </a:rPr>
-              <a:t>放</a:t>
-            </a:r>
-            <a:endParaRPr lang="zh-CN" altLang="zh-TW" sz="5400" b="1" dirty="0">
-              <a:solidFill>
-                <a:srgbClr val="660033"/>
-              </a:solidFill>
-              <a:latin typeface="Microsoft JhengHei" panose="020B0604030504040204" pitchFamily="34" charset="-120"/>
-              <a:ea typeface="Microsoft JhengHei" panose="020B0604030504040204" pitchFamily="34" charset="-120"/>
-            </a:endParaRPr>
+              <a:t>使我釋放</a:t>
+            </a:r>
           </a:p>
         </p:txBody>
       </p:sp>
     </p:spTree>
     <p:extLst>
       <p:ext uri="{BB962C8B-B14F-4D97-AF65-F5344CB8AC3E}">
-        <p14:creationId xmlns:p14="http://schemas.microsoft.com/office/powerpoint/2010/main" val="4199972524"/>
+        <p14:creationId xmlns:p14="http://schemas.microsoft.com/office/powerpoint/2010/main" val="2348879469"/>
       </p:ext>
     </p:extLst>
   </p:cSld>
